--- a/downloads/DCT_V2_Ch16_Slides.pptx
+++ b/downloads/DCT_V2_Ch16_Slides.pptx
@@ -27,9 +27,10 @@
     <p:sldId id="275" r:id="rId21"/>
     <p:sldId id="276" r:id="rId22"/>
     <p:sldId id="277" r:id="rId23"/>
+    <p:sldId id="278" r:id="rId24"/>
   </p:sldIdLst>
   <p:notesMasterIdLst>
-    <p:notesMasterId r:id="rId24"/>
+    <p:notesMasterId r:id="rId25"/>
   </p:notesMasterIdLst>
   <p:sldSz cx="12192000" cy="6858000"/>
   <p:notesSz cx="6858000" cy="12192000"/>
@@ -128,7 +129,7 @@
   <p:extLst>
     <p:ext uri="{521415D9-36F7-43E2-AB2F-B90AF26B5E84}">
       <p14:sectionLst xmlns:p14="http://schemas.microsoft.com/office/powerpoint/2010/main">
-        <p14:section name="Opening" id="{619c0e79-9d69-810e-b5ef-765bcec69bd4}">
+        <p14:section name="Opening" id="{46420945-22a3-8ee7-fa16-4bf9779f9771}">
           <p14:sldIdLst>
             <p14:sldId id="256"/>
             <p14:sldId id="257"/>
@@ -136,36 +137,36 @@
             <p14:sldId id="259"/>
           </p14:sldIdLst>
         </p14:section>
-        <p14:section name="16.1 One Program from Many Pieces" id="{b87a84c4-d0d0-e9f9-3a17-28f6550bc379}">
+        <p14:section name="16.1 One Program from Many Pieces" id="{99d69ee7-7f35-b971-6686-3123e00851d8}">
           <p14:sldIdLst>
             <p14:sldId id="260"/>
             <p14:sldId id="261"/>
           </p14:sldIdLst>
         </p14:section>
-        <p14:section name="16.2 Roadmaps: Order and Timing Are Computed" id="{afc21f3d-bb48-6f85-9721-42dfe1d37207}">
+        <p14:section name="16.2 Roadmaps: Order and Timing Are Computed" id="{9673894e-0075-1982-e979-846c7b27cb41}">
           <p14:sldIdLst>
             <p14:sldId id="262"/>
             <p14:sldId id="263"/>
           </p14:sldIdLst>
         </p14:section>
-        <p14:section name="16.3 Capital Allocation by Internal Prices" id="{c2d30530-76c9-b82a-0757-a40619ef5dec}">
+        <p14:section name="16.3 Capital Allocation by Internal Prices" id="{0c783a61-e01f-5eff-ec79-52ea7e3f08d1}">
           <p14:sldIdLst>
             <p14:sldId id="264"/>
             <p14:sldId id="265"/>
           </p14:sldIdLst>
         </p14:section>
-        <p14:section name="16.4 Certified Decisions and Triggers" id="{e5ccf644-04a1-cf49-30d4-c1fefd362af3}">
+        <p14:section name="16.4 Certified Decisions and Triggers" id="{7be1fd8a-f794-6da0-d4bc-5866ccb2e9fd}">
           <p14:sldIdLst>
             <p14:sldId id="266"/>
             <p14:sldId id="267"/>
           </p14:sldIdLst>
         </p14:section>
-        <p14:section name="16.5 Seven Enterprises, One Method" id="{74d4472a-1632-9a84-ab5e-65721c468c29}">
+        <p14:section name="16.5 Seven Enterprises, One Method" id="{2d7b4a60-14c5-76dc-f535-9ca2b83d587f}">
           <p14:sldIdLst>
             <p14:sldId id="268"/>
           </p14:sldIdLst>
         </p14:section>
-        <p14:section name="Worked Example 16.1" id="{9d2e53c0-85e8-3a89-dd97-8de2ec49893c}">
+        <p14:section name="Worked Example 16.1" id="{4f862384-0cf6-c2c8-5fe3-86fb9b86ad87}">
           <p14:sldIdLst>
             <p14:sldId id="269"/>
             <p14:sldId id="270"/>
@@ -174,16 +175,21 @@
             <p14:sldId id="273"/>
           </p14:sldIdLst>
         </p14:section>
-        <p14:section name="AXIOM Lab 2.16" id="{d484e62d-86a4-5b7a-dbce-683681594943}">
+        <p14:section name="In Practice" id="{6a9a7f06-778b-4ae8-f435-a335b492538a}">
           <p14:sldIdLst>
             <p14:sldId id="274"/>
           </p14:sldIdLst>
         </p14:section>
-        <p14:section name="Close" id="{dcb4fb34-2f9d-4546-c966-1b67dbc28498}">
+        <p14:section name="AXIOM Lab 2.16" id="{e9cbcf0b-5b71-bd5e-1d8a-79a30c4ad09d}">
           <p14:sldIdLst>
             <p14:sldId id="275"/>
+          </p14:sldIdLst>
+        </p14:section>
+        <p14:section name="Close" id="{4009245f-b836-ca3b-f45f-24817e51b4a3}">
+          <p14:sldIdLst>
             <p14:sldId id="276"/>
             <p14:sldId id="277"/>
+            <p14:sldId id="278"/>
           </p14:sldIdLst>
         </p14:section>
       </p14:sectionLst>
@@ -1470,7 +1476,7 @@
           <a:p>
             <a:r>
               <a:rPr lang="en-US" dirty="0"/>
-              <a:t>AXIOM Lab 2.16. What to look for: pieces that fail together (Theorem 16.1(i)); a sale that must come first (Theorem 16.2(ii)); levers bought at the appetite's price and payouts held below it (Theorem 16.1(iii)); a trigger worth more than any commitment (Theorem 16.2(iii)); and a program with no slack until a margin buys a region (Theorem 16.3).</a:t>
+              <a:t>In Practice, Chapter 16: Banks Put a Price on Their Liquidity. A real organization's decision of this chapter's kind, told from its published record; every figure is cited in the book. The lesson for Meridian: UBS funded every line at one favorable rate: certify the sum, not the parts, and price the shared stock. Sources: Grant (2011), BIS FSI; Basel Committee (2008); Senior Supervisors Group (2008, 2009); Swiss Federal Banking Commission (2008); CEBS (2010); SR 16-3 (2016).</a:t>
             </a:r>
             <a:endParaRPr lang="en-US" dirty="0"/>
           </a:p>
@@ -1646,7 +1652,7 @@
           <a:p>
             <a:r>
               <a:rPr lang="en-US" dirty="0"/>
-              <a:t>Key Takeaways, Chapter 16.</a:t>
+              <a:t>AXIOM Lab 2.16. What to look for: pieces that fail together (Theorem 16.1(i)); a sale that must come first (Theorem 16.2(ii)); levers bought at the appetite's price and payouts held below it (Theorem 16.1(iii)); a trigger worth more than any commitment (Theorem 16.2(iii)); and a program with no slack until a margin buys a region (Theorem 16.3).</a:t>
             </a:r>
             <a:endParaRPr lang="en-US" dirty="0"/>
           </a:p>
@@ -1734,7 +1740,7 @@
           <a:p>
             <a:r>
               <a:rPr lang="en-US" dirty="0"/>
-              <a:t>The notebook and workbook are on the course website, www.dynamiccorporatetransformation.com. The paths are Chapter 9's, drawn from Volume I's stream with seed 8 and checked on fresh paths drawn with seed 26209; the lab's seed is used only for new draws.</a:t>
+              <a:t>Key Takeaways, Chapter 16.</a:t>
             </a:r>
             <a:endParaRPr lang="en-US" dirty="0"/>
           </a:p>
@@ -1822,7 +1828,7 @@
           <a:p>
             <a:r>
               <a:rPr lang="en-US" dirty="0"/>
-              <a:t>The last slide of the series. Volume I's last chapter ran the seven moves of the DCT Map as a loop, the transformation lifecycle, with readiness gates before optimizing. Volume II's last chapter closes the loop for Meridian: a roadmap whose order and milestones are computed (Execute), a twin that watches the certificates (Monitor), and triggers stated in advance (Adapt): keep the program while the estimates stay inside the certified region of Theorem 16.3, and re-certify at the first exit or alarm.</a:t>
+              <a:t>The notebook and workbook are on the course website, www.dynamiccorporatetransformation.com. The paths are Chapter 9's, drawn from Volume I's stream with seed 8 and checked on fresh paths drawn with seed 26209; the lab's seed is used only for new draws.</a:t>
             </a:r>
             <a:endParaRPr lang="en-US" dirty="0"/>
           </a:p>
@@ -1846,6 +1852,94 @@
             <a:fld id="{F7021451-1387-4CA6-816F-3879F97B5CBC}" type="slidenum">
               <a:rPr lang="en-US"/>
               <a:t>22</a:t>
+            </a:fld>
+            <a:endParaRPr lang="en-US"/>
+          </a:p>
+        </p:txBody>
+      </p:sp>
+    </p:spTree>
+    <p:extLst>
+      <p:ext uri="{BB962C8B-B14F-4D97-AF65-F5344CB8AC3E}">
+        <p14:creationId xmlns:p14="http://schemas.microsoft.com/office/powerpoint/2010/main" val="1024086991"/>
+      </p:ext>
+    </p:extLst>
+  </p:cSld>
+  <p:clrMapOvr>
+    <a:masterClrMapping/>
+  </p:clrMapOvr>
+</p:notes>
+</file>
+
+<file path=ppt/notesSlides/notesSlide23.xml><?xml version="1.0" encoding="utf-8"?>
+<p:notes xmlns:a="http://schemas.openxmlformats.org/drawingml/2006/main" xmlns:r="http://schemas.openxmlformats.org/officeDocument/2006/relationships" xmlns:p="http://schemas.openxmlformats.org/presentationml/2006/main">
+  <p:cSld>
+    <p:spTree>
+      <p:nvGrpSpPr>
+        <p:cNvPr id="1" name=""/>
+        <p:cNvGrpSpPr/>
+        <p:nvPr/>
+      </p:nvGrpSpPr>
+      <p:grpSpPr>
+        <a:xfrm>
+          <a:off x="0" y="0"/>
+          <a:ext cx="0" cy="0"/>
+          <a:chOff x="0" y="0"/>
+          <a:chExt cx="0" cy="0"/>
+        </a:xfrm>
+      </p:grpSpPr>
+      <p:sp>
+        <p:nvSpPr>
+          <p:cNvPr id="2" name="Slide Image Placeholder 1"/>
+          <p:cNvSpPr>
+            <a:spLocks noGrp="1" noRot="1" noChangeAspect="1"/>
+          </p:cNvSpPr>
+          <p:nvPr>
+            <p:ph type="sldImg"/>
+          </p:nvPr>
+        </p:nvSpPr>
+        <p:spPr/>
+      </p:sp>
+      <p:sp>
+        <p:nvSpPr>
+          <p:cNvPr id="3" name="Notes Placeholder 2"/>
+          <p:cNvSpPr>
+            <a:spLocks noGrp="1"/>
+          </p:cNvSpPr>
+          <p:nvPr>
+            <p:ph type="body" idx="1"/>
+          </p:nvPr>
+        </p:nvSpPr>
+        <p:spPr/>
+        <p:txBody>
+          <a:bodyPr/>
+          <a:lstStyle/>
+          <a:p>
+            <a:r>
+              <a:rPr lang="en-US" dirty="0"/>
+              <a:t>The last slide of the series. Volume I's last chapter ran the seven moves of the DCT Map as a loop, the transformation lifecycle, with readiness gates before optimizing. Volume II's last chapter closes the loop for Meridian: a roadmap whose order and milestones are computed (Execute), a twin that watches the certificates (Monitor), and triggers stated in advance (Adapt): keep the program while the estimates stay inside the certified region of Theorem 16.3, and re-certify at the first exit or alarm.</a:t>
+            </a:r>
+            <a:endParaRPr lang="en-US" dirty="0"/>
+          </a:p>
+        </p:txBody>
+      </p:sp>
+      <p:sp>
+        <p:nvSpPr>
+          <p:cNvPr id="4" name="Slide Number Placeholder 3"/>
+          <p:cNvSpPr>
+            <a:spLocks noGrp="1"/>
+          </p:cNvSpPr>
+          <p:nvPr>
+            <p:ph type="sldNum" sz="quarter" idx="10"/>
+          </p:nvPr>
+        </p:nvSpPr>
+        <p:spPr/>
+        <p:txBody>
+          <a:bodyPr/>
+          <a:lstStyle/>
+          <a:p>
+            <a:fld id="{F7021451-1387-4CA6-816F-3879F97B5CBC}" type="slidenum">
+              <a:rPr lang="en-US"/>
+              <a:t>23</a:t>
             </a:fld>
             <a:endParaRPr lang="en-US"/>
           </a:p>
@@ -15308,7 +15402,7 @@
                   <a:schemeClr val="accent1"/>
                 </a:solidFill>
               </a:rPr>
-              <a:t>AXIOM LAB 2.16 · MODULE AXIOM-16</a:t>
+              <a:t>IN PRACTICE · FUNDS TRANSFER PRICING</a:t>
             </a:r>
             <a:endParaRPr lang="en-US" sz="1200" dirty="0"/>
           </a:p>
@@ -15349,804 +15443,26 @@
                 <a:ea typeface="Cambria" pitchFamily="34" charset="-122"/>
                 <a:cs typeface="Cambria" pitchFamily="34" charset="-120"/>
               </a:rPr>
-              <a:t>Check, order, price, certify, in AXIOM</a:t>
+              <a:t>Banks put a price on their liquidity</a:t>
             </a:r>
             <a:endParaRPr lang="en-US" sz="3200" dirty="0"/>
           </a:p>
         </p:txBody>
       </p:sp>
-      <p:pic>
-        <p:nvPicPr>
-          <p:cNvPr id="5" name="AXIOM logo" descr="AXIOM">    </p:cNvPr>
-          <p:cNvPicPr>
-            <a:picLocks noChangeAspect="1"/>
-          </p:cNvPicPr>
-          <p:nvPr/>
-        </p:nvPicPr>
-        <p:blipFill>
-          <a:blip r:embed="rId1"/>
-          <a:stretch>
-            <a:fillRect/>
-          </a:stretch>
-        </p:blipFill>
-        <p:spPr>
-          <a:xfrm>
-            <a:off x="9539935" y="310896"/>
-            <a:ext cx="2103120" cy="420624"/>
-          </a:xfrm>
-          <a:prstGeom prst="rect">
-            <a:avLst/>
-          </a:prstGeom>
-        </p:spPr>
-      </p:pic>
-      <p:sp>
-        <p:nvSpPr>
-          <p:cNvPr id="6" name="Situation"/>
-          <p:cNvSpPr txBox="1"/>
-          <p:nvPr/>
-        </p:nvSpPr>
-        <p:spPr>
-          <a:xfrm>
-            <a:off x="548640" y="1645920"/>
-            <a:ext cx="11094415" cy="777240"/>
-          </a:xfrm>
-          <a:prstGeom prst="rect">
-            <a:avLst/>
-          </a:prstGeom>
-          <a:noFill/>
-          <a:ln/>
-        </p:spPr>
-        <p:txBody>
-          <a:bodyPr wrap="square" lIns="0" tIns="0" rIns="0" bIns="0" rtlCol="0" anchor="t"/>
-          <a:lstStyle/>
-          <a:p>
-            <a:pPr indent="0" marL="0">
-              <a:buNone/>
-            </a:pPr>
-            <a:r>
-              <a:rPr lang="en-US" sz="1500" dirty="0">
-                <a:solidFill>
-                  <a:schemeClr val="tx1"/>
-                </a:solidFill>
-              </a:rPr>
-              <a:t>Meridian's board wants to sign one program: the sale, the build with its financing, and the automation rounds with their payouts. The CFO asks whether the pieces fit together, in what order, at what cost, and on what terms. Open AXIOM, choose Lab 2.16 and load Meridian's program.</a:t>
-            </a:r>
-            <a:endParaRPr lang="en-US" sz="1500" dirty="0"/>
-          </a:p>
-        </p:txBody>
-      </p:sp>
-      <p:sp>
-        <p:nvSpPr>
-          <p:cNvPr id="7" name="Flow line"/>
+      <p:sp>
+        <p:nvSpPr>
+          <p:cNvPr id="5" name="Card"/>
           <p:cNvSpPr/>
           <p:nvPr/>
         </p:nvSpPr>
         <p:spPr>
           <a:xfrm>
-            <a:off x="1658082" y="2880360"/>
-            <a:ext cx="8875532" cy="0"/>
-          </a:xfrm>
-          <a:prstGeom prst="line">
-            <a:avLst/>
-          </a:prstGeom>
-          <a:noFill/>
-          <a:ln w="25400">
-            <a:solidFill>
-              <a:srgbClr val="C4CBD8"/>
-            </a:solidFill>
-            <a:prstDash val="solid"/>
-          </a:ln>
-        </p:spPr>
-      </p:sp>
-      <p:sp>
-        <p:nvSpPr>
-          <p:cNvPr id="8" name="Number"/>
-          <p:cNvSpPr/>
-          <p:nvPr/>
-        </p:nvSpPr>
-        <p:spPr>
-          <a:xfrm>
-            <a:off x="1383762" y="2606040"/>
-            <a:ext cx="548640" cy="548640"/>
-          </a:xfrm>
-          <a:prstGeom prst="ellipse">
-            <a:avLst/>
-          </a:prstGeom>
-          <a:solidFill>
-            <a:schemeClr val="accent1"/>
-          </a:solidFill>
-          <a:ln w="6350">
-            <a:solidFill>
-              <a:schemeClr val="accent1"/>
-            </a:solidFill>
-            <a:prstDash val="solid"/>
-          </a:ln>
-        </p:spPr>
-      </p:sp>
-      <p:sp>
-        <p:nvSpPr>
-          <p:cNvPr id="9" name="Text 5"/>
-          <p:cNvSpPr txBox="1"/>
-          <p:nvPr/>
-        </p:nvSpPr>
-        <p:spPr>
-          <a:xfrm>
-            <a:off x="1383762" y="2606040"/>
-            <a:ext cx="548640" cy="548640"/>
-          </a:xfrm>
-          <a:prstGeom prst="rect">
-            <a:avLst/>
-          </a:prstGeom>
-          <a:noFill/>
-          <a:ln/>
-        </p:spPr>
-        <p:txBody>
-          <a:bodyPr wrap="square" lIns="0" tIns="0" rIns="0" bIns="0" rtlCol="0" anchor="ctr"/>
-          <a:lstStyle/>
-          <a:p>
-            <a:pPr algn="ctr" indent="0" marL="0">
-              <a:buNone/>
-            </a:pPr>
-            <a:r>
-              <a:rPr lang="en-US" sz="1600" b="1" dirty="0">
-                <a:solidFill>
-                  <a:schemeClr val="bg1"/>
-                </a:solidFill>
-                <a:latin typeface="Calibri" pitchFamily="34" charset="0"/>
-                <a:ea typeface="Calibri" pitchFamily="34" charset="-122"/>
-                <a:cs typeface="Calibri" pitchFamily="34" charset="-120"/>
-              </a:rPr>
-              <a:t>1</a:t>
-            </a:r>
-            <a:endParaRPr lang="en-US" sz="1600" dirty="0"/>
-          </a:p>
-        </p:txBody>
-      </p:sp>
-      <p:sp>
-        <p:nvSpPr>
-          <p:cNvPr id="10" name="Flow head"/>
-          <p:cNvSpPr txBox="1"/>
-          <p:nvPr/>
-        </p:nvSpPr>
-        <p:spPr>
-          <a:xfrm>
-            <a:off x="621792" y="3291840"/>
-            <a:ext cx="2072579" cy="548640"/>
-          </a:xfrm>
-          <a:prstGeom prst="rect">
-            <a:avLst/>
-          </a:prstGeom>
-          <a:noFill/>
-          <a:ln/>
-        </p:spPr>
-        <p:txBody>
-          <a:bodyPr wrap="square" lIns="0" tIns="0" rIns="0" bIns="0" rtlCol="0" anchor="t"/>
-          <a:lstStyle/>
-          <a:p>
-            <a:pPr algn="ctr" indent="0" marL="0">
-              <a:buNone/>
-            </a:pPr>
-            <a:r>
-              <a:rPr lang="en-US" sz="1600" b="1" dirty="0">
-                <a:solidFill>
-                  <a:schemeClr val="tx1"/>
-                </a:solidFill>
-                <a:latin typeface="Cambria" pitchFamily="34" charset="0"/>
-                <a:ea typeface="Cambria" pitchFamily="34" charset="-122"/>
-                <a:cs typeface="Cambria" pitchFamily="34" charset="-120"/>
-              </a:rPr>
-              <a:t>Check jointly</a:t>
-            </a:r>
-            <a:endParaRPr lang="en-US" sz="1600" dirty="0"/>
-          </a:p>
-        </p:txBody>
-      </p:sp>
-      <p:sp>
-        <p:nvSpPr>
-          <p:cNvPr id="11" name="Flow text"/>
-          <p:cNvSpPr txBox="1"/>
-          <p:nvPr/>
-        </p:nvSpPr>
-        <p:spPr>
-          <a:xfrm>
-            <a:off x="640080" y="3867912"/>
-            <a:ext cx="2036003" cy="1554480"/>
-          </a:xfrm>
-          <a:prstGeom prst="rect">
-            <a:avLst/>
-          </a:prstGeom>
-          <a:noFill/>
-          <a:ln/>
-        </p:spPr>
-        <p:txBody>
-          <a:bodyPr wrap="square" lIns="0" tIns="0" rIns="0" bIns="0" rtlCol="0" anchor="t"/>
-          <a:lstStyle/>
-          <a:p>
-            <a:pPr algn="ctr" indent="0" marL="0">
-              <a:buNone/>
-            </a:pPr>
-            <a:r>
-              <a:rPr lang="en-US" sz="1400" dirty="0">
-                <a:solidFill>
-                  <a:schemeClr val="tx2"/>
-                </a:solidFill>
-              </a:rPr>
-              <a:t>Sign Chapter 5's plan and Volume I's package together; read the breach chance and the claims.</a:t>
-            </a:r>
-            <a:endParaRPr lang="en-US" sz="1400" dirty="0"/>
-          </a:p>
-        </p:txBody>
-      </p:sp>
-      <p:sp>
-        <p:nvSpPr>
-          <p:cNvPr id="12" name="Number"/>
-          <p:cNvSpPr/>
-          <p:nvPr/>
-        </p:nvSpPr>
-        <p:spPr>
-          <a:xfrm>
-            <a:off x="3602645" y="2606040"/>
-            <a:ext cx="548640" cy="548640"/>
-          </a:xfrm>
-          <a:prstGeom prst="ellipse">
-            <a:avLst/>
-          </a:prstGeom>
-          <a:solidFill>
-            <a:schemeClr val="accent1"/>
-          </a:solidFill>
-          <a:ln w="6350">
-            <a:solidFill>
-              <a:schemeClr val="accent1"/>
-            </a:solidFill>
-            <a:prstDash val="solid"/>
-          </a:ln>
-        </p:spPr>
-      </p:sp>
-      <p:sp>
-        <p:nvSpPr>
-          <p:cNvPr id="13" name="Text 9"/>
-          <p:cNvSpPr txBox="1"/>
-          <p:nvPr/>
-        </p:nvSpPr>
-        <p:spPr>
-          <a:xfrm>
-            <a:off x="3602645" y="2606040"/>
-            <a:ext cx="548640" cy="548640"/>
-          </a:xfrm>
-          <a:prstGeom prst="rect">
-            <a:avLst/>
-          </a:prstGeom>
-          <a:noFill/>
-          <a:ln/>
-        </p:spPr>
-        <p:txBody>
-          <a:bodyPr wrap="square" lIns="0" tIns="0" rIns="0" bIns="0" rtlCol="0" anchor="ctr"/>
-          <a:lstStyle/>
-          <a:p>
-            <a:pPr algn="ctr" indent="0" marL="0">
-              <a:buNone/>
-            </a:pPr>
-            <a:r>
-              <a:rPr lang="en-US" sz="1600" b="1" dirty="0">
-                <a:solidFill>
-                  <a:schemeClr val="bg1"/>
-                </a:solidFill>
-                <a:latin typeface="Calibri" pitchFamily="34" charset="0"/>
-                <a:ea typeface="Calibri" pitchFamily="34" charset="-122"/>
-                <a:cs typeface="Calibri" pitchFamily="34" charset="-120"/>
-              </a:rPr>
-              <a:t>2</a:t>
-            </a:r>
-            <a:endParaRPr lang="en-US" sz="1600" dirty="0"/>
-          </a:p>
-        </p:txBody>
-      </p:sp>
-      <p:sp>
-        <p:nvSpPr>
-          <p:cNvPr id="14" name="Flow head"/>
-          <p:cNvSpPr txBox="1"/>
-          <p:nvPr/>
-        </p:nvSpPr>
-        <p:spPr>
-          <a:xfrm>
-            <a:off x="2840675" y="3291840"/>
-            <a:ext cx="2072579" cy="548640"/>
-          </a:xfrm>
-          <a:prstGeom prst="rect">
-            <a:avLst/>
-          </a:prstGeom>
-          <a:noFill/>
-          <a:ln/>
-        </p:spPr>
-        <p:txBody>
-          <a:bodyPr wrap="square" lIns="0" tIns="0" rIns="0" bIns="0" rtlCol="0" anchor="t"/>
-          <a:lstStyle/>
-          <a:p>
-            <a:pPr algn="ctr" indent="0" marL="0">
-              <a:buNone/>
-            </a:pPr>
-            <a:r>
-              <a:rPr lang="en-US" sz="1600" b="1" dirty="0">
-                <a:solidFill>
-                  <a:schemeClr val="tx1"/>
-                </a:solidFill>
-                <a:latin typeface="Cambria" pitchFamily="34" charset="0"/>
-                <a:ea typeface="Cambria" pitchFamily="34" charset="-122"/>
-                <a:cs typeface="Cambria" pitchFamily="34" charset="-120"/>
-              </a:rPr>
-              <a:t>Order</a:t>
-            </a:r>
-            <a:endParaRPr lang="en-US" sz="1600" dirty="0"/>
-          </a:p>
-        </p:txBody>
-      </p:sp>
-      <p:sp>
-        <p:nvSpPr>
-          <p:cNvPr id="15" name="Flow text"/>
-          <p:cNvSpPr txBox="1"/>
-          <p:nvPr/>
-        </p:nvSpPr>
-        <p:spPr>
-          <a:xfrm>
-            <a:off x="2858963" y="3867912"/>
-            <a:ext cx="2036003" cy="1554480"/>
-          </a:xfrm>
-          <a:prstGeom prst="rect">
-            <a:avLst/>
-          </a:prstGeom>
-          <a:noFill/>
-          <a:ln/>
-        </p:spPr>
-        <p:txBody>
-          <a:bodyPr wrap="square" lIns="0" tIns="0" rIns="0" bIns="0" rtlCol="0" anchor="t"/>
-          <a:lstStyle/>
-          <a:p>
-            <a:pPr algn="ctr" indent="0" marL="0">
-              <a:buNone/>
-            </a:pPr>
-            <a:r>
-              <a:rPr lang="en-US" sz="1400" dirty="0">
-                <a:solidFill>
-                  <a:schemeClr val="tx2"/>
-                </a:solidFill>
-              </a:rPr>
-              <a:t>Move the sale before and after the build, and the rounds across years; price each order.</a:t>
-            </a:r>
-            <a:endParaRPr lang="en-US" sz="1400" dirty="0"/>
-          </a:p>
-        </p:txBody>
-      </p:sp>
-      <p:sp>
-        <p:nvSpPr>
-          <p:cNvPr id="16" name="Number"/>
-          <p:cNvSpPr/>
-          <p:nvPr/>
-        </p:nvSpPr>
-        <p:spPr>
-          <a:xfrm>
-            <a:off x="5821528" y="2606040"/>
-            <a:ext cx="548640" cy="548640"/>
-          </a:xfrm>
-          <a:prstGeom prst="ellipse">
-            <a:avLst/>
-          </a:prstGeom>
-          <a:solidFill>
-            <a:schemeClr val="accent1"/>
-          </a:solidFill>
-          <a:ln w="6350">
-            <a:solidFill>
-              <a:schemeClr val="accent1"/>
-            </a:solidFill>
-            <a:prstDash val="solid"/>
-          </a:ln>
-        </p:spPr>
-      </p:sp>
-      <p:sp>
-        <p:nvSpPr>
-          <p:cNvPr id="17" name="Text 13"/>
-          <p:cNvSpPr txBox="1"/>
-          <p:nvPr/>
-        </p:nvSpPr>
-        <p:spPr>
-          <a:xfrm>
-            <a:off x="5821528" y="2606040"/>
-            <a:ext cx="548640" cy="548640"/>
-          </a:xfrm>
-          <a:prstGeom prst="rect">
-            <a:avLst/>
-          </a:prstGeom>
-          <a:noFill/>
-          <a:ln/>
-        </p:spPr>
-        <p:txBody>
-          <a:bodyPr wrap="square" lIns="0" tIns="0" rIns="0" bIns="0" rtlCol="0" anchor="ctr"/>
-          <a:lstStyle/>
-          <a:p>
-            <a:pPr algn="ctr" indent="0" marL="0">
-              <a:buNone/>
-            </a:pPr>
-            <a:r>
-              <a:rPr lang="en-US" sz="1600" b="1" dirty="0">
-                <a:solidFill>
-                  <a:schemeClr val="bg1"/>
-                </a:solidFill>
-                <a:latin typeface="Calibri" pitchFamily="34" charset="0"/>
-                <a:ea typeface="Calibri" pitchFamily="34" charset="-122"/>
-                <a:cs typeface="Calibri" pitchFamily="34" charset="-120"/>
-              </a:rPr>
-              <a:t>3</a:t>
-            </a:r>
-            <a:endParaRPr lang="en-US" sz="1600" dirty="0"/>
-          </a:p>
-        </p:txBody>
-      </p:sp>
-      <p:sp>
-        <p:nvSpPr>
-          <p:cNvPr id="18" name="Flow head"/>
-          <p:cNvSpPr txBox="1"/>
-          <p:nvPr/>
-        </p:nvSpPr>
-        <p:spPr>
-          <a:xfrm>
-            <a:off x="5059558" y="3291840"/>
-            <a:ext cx="2072579" cy="548640"/>
-          </a:xfrm>
-          <a:prstGeom prst="rect">
-            <a:avLst/>
-          </a:prstGeom>
-          <a:noFill/>
-          <a:ln/>
-        </p:spPr>
-        <p:txBody>
-          <a:bodyPr wrap="square" lIns="0" tIns="0" rIns="0" bIns="0" rtlCol="0" anchor="t"/>
-          <a:lstStyle/>
-          <a:p>
-            <a:pPr algn="ctr" indent="0" marL="0">
-              <a:buNone/>
-            </a:pPr>
-            <a:r>
-              <a:rPr lang="en-US" sz="1600" b="1" dirty="0">
-                <a:solidFill>
-                  <a:schemeClr val="tx1"/>
-                </a:solidFill>
-                <a:latin typeface="Cambria" pitchFamily="34" charset="0"/>
-                <a:ea typeface="Cambria" pitchFamily="34" charset="-122"/>
-                <a:cs typeface="Cambria" pitchFamily="34" charset="-120"/>
-              </a:rPr>
-              <a:t>Price</a:t>
-            </a:r>
-            <a:endParaRPr lang="en-US" sz="1600" dirty="0"/>
-          </a:p>
-        </p:txBody>
-      </p:sp>
-      <p:sp>
-        <p:nvSpPr>
-          <p:cNvPr id="19" name="Flow text"/>
-          <p:cNvSpPr txBox="1"/>
-          <p:nvPr/>
-        </p:nvSpPr>
-        <p:spPr>
-          <a:xfrm>
-            <a:off x="5077846" y="3867912"/>
-            <a:ext cx="2036003" cy="1554480"/>
-          </a:xfrm>
-          <a:prstGeom prst="rect">
-            <a:avLst/>
-          </a:prstGeom>
-          <a:noFill/>
-          <a:ln/>
-        </p:spPr>
-        <p:txBody>
-          <a:bodyPr wrap="square" lIns="0" tIns="0" rIns="0" bIns="0" rtlCol="0" anchor="t"/>
-          <a:lstStyle/>
-          <a:p>
-            <a:pPr algn="ctr" indent="0" marL="0">
-              <a:buNone/>
-            </a:pPr>
-            <a:r>
-              <a:rPr lang="en-US" sz="1400" dirty="0">
-                <a:solidFill>
-                  <a:schemeClr val="tx2"/>
-                </a:solidFill>
-              </a:rPr>
-              <a:t>Read the appetite's price and each lever's cost per point of chance; hold or release the payouts.</a:t>
-            </a:r>
-            <a:endParaRPr lang="en-US" sz="1400" dirty="0"/>
-          </a:p>
-        </p:txBody>
-      </p:sp>
-      <p:sp>
-        <p:nvSpPr>
-          <p:cNvPr id="20" name="Number"/>
-          <p:cNvSpPr/>
-          <p:nvPr/>
-        </p:nvSpPr>
-        <p:spPr>
-          <a:xfrm>
-            <a:off x="8040411" y="2606040"/>
-            <a:ext cx="548640" cy="548640"/>
-          </a:xfrm>
-          <a:prstGeom prst="ellipse">
-            <a:avLst/>
-          </a:prstGeom>
-          <a:solidFill>
-            <a:schemeClr val="accent1"/>
-          </a:solidFill>
-          <a:ln w="6350">
-            <a:solidFill>
-              <a:schemeClr val="accent1"/>
-            </a:solidFill>
-            <a:prstDash val="solid"/>
-          </a:ln>
-        </p:spPr>
-      </p:sp>
-      <p:sp>
-        <p:nvSpPr>
-          <p:cNvPr id="21" name="Text 17"/>
-          <p:cNvSpPr txBox="1"/>
-          <p:nvPr/>
-        </p:nvSpPr>
-        <p:spPr>
-          <a:xfrm>
-            <a:off x="8040411" y="2606040"/>
-            <a:ext cx="548640" cy="548640"/>
-          </a:xfrm>
-          <a:prstGeom prst="rect">
-            <a:avLst/>
-          </a:prstGeom>
-          <a:noFill/>
-          <a:ln/>
-        </p:spPr>
-        <p:txBody>
-          <a:bodyPr wrap="square" lIns="0" tIns="0" rIns="0" bIns="0" rtlCol="0" anchor="ctr"/>
-          <a:lstStyle/>
-          <a:p>
-            <a:pPr algn="ctr" indent="0" marL="0">
-              <a:buNone/>
-            </a:pPr>
-            <a:r>
-              <a:rPr lang="en-US" sz="1600" b="1" dirty="0">
-                <a:solidFill>
-                  <a:schemeClr val="bg1"/>
-                </a:solidFill>
-                <a:latin typeface="Calibri" pitchFamily="34" charset="0"/>
-                <a:ea typeface="Calibri" pitchFamily="34" charset="-122"/>
-                <a:cs typeface="Calibri" pitchFamily="34" charset="-120"/>
-              </a:rPr>
-              <a:t>4</a:t>
-            </a:r>
-            <a:endParaRPr lang="en-US" sz="1600" dirty="0"/>
-          </a:p>
-        </p:txBody>
-      </p:sp>
-      <p:sp>
-        <p:nvSpPr>
-          <p:cNvPr id="22" name="Flow head"/>
-          <p:cNvSpPr txBox="1"/>
-          <p:nvPr/>
-        </p:nvSpPr>
-        <p:spPr>
-          <a:xfrm>
-            <a:off x="7278441" y="3291840"/>
-            <a:ext cx="2072579" cy="548640"/>
-          </a:xfrm>
-          <a:prstGeom prst="rect">
-            <a:avLst/>
-          </a:prstGeom>
-          <a:noFill/>
-          <a:ln/>
-        </p:spPr>
-        <p:txBody>
-          <a:bodyPr wrap="square" lIns="0" tIns="0" rIns="0" bIns="0" rtlCol="0" anchor="t"/>
-          <a:lstStyle/>
-          <a:p>
-            <a:pPr algn="ctr" indent="0" marL="0">
-              <a:buNone/>
-            </a:pPr>
-            <a:r>
-              <a:rPr lang="en-US" sz="1600" b="1" dirty="0">
-                <a:solidFill>
-                  <a:schemeClr val="tx1"/>
-                </a:solidFill>
-                <a:latin typeface="Cambria" pitchFamily="34" charset="0"/>
-                <a:ea typeface="Cambria" pitchFamily="34" charset="-122"/>
-                <a:cs typeface="Cambria" pitchFamily="34" charset="-120"/>
-              </a:rPr>
-              <a:t>Keep a choice open</a:t>
-            </a:r>
-            <a:endParaRPr lang="en-US" sz="1600" dirty="0"/>
-          </a:p>
-        </p:txBody>
-      </p:sp>
-      <p:sp>
-        <p:nvSpPr>
-          <p:cNvPr id="23" name="Flow text"/>
-          <p:cNvSpPr txBox="1"/>
-          <p:nvPr/>
-        </p:nvSpPr>
-        <p:spPr>
-          <a:xfrm>
-            <a:off x="7296729" y="3867912"/>
-            <a:ext cx="2036003" cy="1554480"/>
-          </a:xfrm>
-          <a:prstGeom prst="rect">
-            <a:avLst/>
-          </a:prstGeom>
-          <a:noFill/>
-          <a:ln/>
-        </p:spPr>
-        <p:txBody>
-          <a:bodyPr wrap="square" lIns="0" tIns="0" rIns="0" bIns="0" rtlCol="0" anchor="t"/>
-          <a:lstStyle/>
-          <a:p>
-            <a:pPr algn="ctr" indent="0" marL="0">
-              <a:buNone/>
-            </a:pPr>
-            <a:r>
-              <a:rPr lang="en-US" sz="1400" dirty="0">
-                <a:solidFill>
-                  <a:schemeClr val="tx2"/>
-                </a:solidFill>
-              </a:rPr>
-              <a:t>Put round 3 on a trigger and find the best trigger.</a:t>
-            </a:r>
-            <a:endParaRPr lang="en-US" sz="1400" dirty="0"/>
-          </a:p>
-        </p:txBody>
-      </p:sp>
-      <p:sp>
-        <p:nvSpPr>
-          <p:cNvPr id="24" name="Number"/>
-          <p:cNvSpPr/>
-          <p:nvPr/>
-        </p:nvSpPr>
-        <p:spPr>
-          <a:xfrm>
-            <a:off x="10259294" y="2606040"/>
-            <a:ext cx="548640" cy="548640"/>
-          </a:xfrm>
-          <a:prstGeom prst="ellipse">
-            <a:avLst/>
-          </a:prstGeom>
-          <a:solidFill>
-            <a:schemeClr val="accent1"/>
-          </a:solidFill>
-          <a:ln w="6350">
-            <a:solidFill>
-              <a:schemeClr val="accent1"/>
-            </a:solidFill>
-            <a:prstDash val="solid"/>
-          </a:ln>
-        </p:spPr>
-      </p:sp>
-      <p:sp>
-        <p:nvSpPr>
-          <p:cNvPr id="25" name="Text 21"/>
-          <p:cNvSpPr txBox="1"/>
-          <p:nvPr/>
-        </p:nvSpPr>
-        <p:spPr>
-          <a:xfrm>
-            <a:off x="10259294" y="2606040"/>
-            <a:ext cx="548640" cy="548640"/>
-          </a:xfrm>
-          <a:prstGeom prst="rect">
-            <a:avLst/>
-          </a:prstGeom>
-          <a:noFill/>
-          <a:ln/>
-        </p:spPr>
-        <p:txBody>
-          <a:bodyPr wrap="square" lIns="0" tIns="0" rIns="0" bIns="0" rtlCol="0" anchor="ctr"/>
-          <a:lstStyle/>
-          <a:p>
-            <a:pPr algn="ctr" indent="0" marL="0">
-              <a:buNone/>
-            </a:pPr>
-            <a:r>
-              <a:rPr lang="en-US" sz="1600" b="1" dirty="0">
-                <a:solidFill>
-                  <a:schemeClr val="bg1"/>
-                </a:solidFill>
-                <a:latin typeface="Calibri" pitchFamily="34" charset="0"/>
-                <a:ea typeface="Calibri" pitchFamily="34" charset="-122"/>
-                <a:cs typeface="Calibri" pitchFamily="34" charset="-120"/>
-              </a:rPr>
-              <a:t>5</a:t>
-            </a:r>
-            <a:endParaRPr lang="en-US" sz="1600" dirty="0"/>
-          </a:p>
-        </p:txBody>
-      </p:sp>
-      <p:sp>
-        <p:nvSpPr>
-          <p:cNvPr id="26" name="Flow head"/>
-          <p:cNvSpPr txBox="1"/>
-          <p:nvPr/>
-        </p:nvSpPr>
-        <p:spPr>
-          <a:xfrm>
-            <a:off x="9497324" y="3291840"/>
-            <a:ext cx="2072579" cy="548640"/>
-          </a:xfrm>
-          <a:prstGeom prst="rect">
-            <a:avLst/>
-          </a:prstGeom>
-          <a:noFill/>
-          <a:ln/>
-        </p:spPr>
-        <p:txBody>
-          <a:bodyPr wrap="square" lIns="0" tIns="0" rIns="0" bIns="0" rtlCol="0" anchor="t"/>
-          <a:lstStyle/>
-          <a:p>
-            <a:pPr algn="ctr" indent="0" marL="0">
-              <a:buNone/>
-            </a:pPr>
-            <a:r>
-              <a:rPr lang="en-US" sz="1600" b="1" dirty="0">
-                <a:solidFill>
-                  <a:schemeClr val="tx1"/>
-                </a:solidFill>
-                <a:latin typeface="Cambria" pitchFamily="34" charset="0"/>
-                <a:ea typeface="Cambria" pitchFamily="34" charset="-122"/>
-                <a:cs typeface="Cambria" pitchFamily="34" charset="-120"/>
-              </a:rPr>
-              <a:t>Certify</a:t>
-            </a:r>
-            <a:endParaRPr lang="en-US" sz="1600" dirty="0"/>
-          </a:p>
-        </p:txBody>
-      </p:sp>
-      <p:sp>
-        <p:nvSpPr>
-          <p:cNvPr id="27" name="Flow text"/>
-          <p:cNvSpPr txBox="1"/>
-          <p:nvPr/>
-        </p:nvSpPr>
-        <p:spPr>
-          <a:xfrm>
-            <a:off x="9515612" y="3867912"/>
-            <a:ext cx="2036003" cy="1554480"/>
-          </a:xfrm>
-          <a:prstGeom prst="rect">
-            <a:avLst/>
-          </a:prstGeom>
-          <a:noFill/>
-          <a:ln/>
-        </p:spPr>
-        <p:txBody>
-          <a:bodyPr wrap="square" lIns="0" tIns="0" rIns="0" bIns="0" rtlCol="0" anchor="t"/>
-          <a:lstStyle/>
-          <a:p>
-            <a:pPr algn="ctr" indent="0" marL="0">
-              <a:buNone/>
-            </a:pPr>
-            <a:r>
-              <a:rPr lang="en-US" sz="1400" dirty="0">
-                <a:solidFill>
-                  <a:schemeClr val="tx2"/>
-                </a:solidFill>
-              </a:rPr>
-              <a:t>Buy margins of appetite, read the region along the closure rate and the spread, set the triggers.</a:t>
-            </a:r>
-            <a:endParaRPr lang="en-US" sz="1400" dirty="0"/>
-          </a:p>
-        </p:txBody>
-      </p:sp>
-      <p:sp>
-        <p:nvSpPr>
-          <p:cNvPr id="28" name="Deliverable card"/>
-          <p:cNvSpPr/>
-          <p:nvPr/>
-        </p:nvSpPr>
-        <p:spPr>
-          <a:xfrm>
-            <a:off x="548640" y="5486400"/>
-            <a:ext cx="11094415" cy="685800"/>
+            <a:off x="548640" y="1691640"/>
+            <a:ext cx="3515258" cy="2103120"/>
           </a:xfrm>
           <a:prstGeom prst="roundRect">
             <a:avLst>
-              <a:gd name="adj" fmla="val 10667"/>
+              <a:gd name="adj" fmla="val 3478"/>
             </a:avLst>
           </a:prstGeom>
           <a:solidFill>
@@ -16162,14 +15478,14 @@
       </p:sp>
       <p:sp>
         <p:nvSpPr>
-          <p:cNvPr id="29" name="Deliverable"/>
+          <p:cNvPr id="6" name="Card label"/>
           <p:cNvSpPr txBox="1"/>
           <p:nvPr/>
         </p:nvSpPr>
         <p:spPr>
           <a:xfrm>
-            <a:off x="777240" y="5559552"/>
-            <a:ext cx="10637215" cy="539496"/>
+            <a:off x="731520" y="1819656"/>
+            <a:ext cx="3149498" cy="310896"/>
           </a:xfrm>
           <a:prstGeom prst="rect">
             <a:avLst/>
@@ -16185,22 +15501,779 @@
               <a:buNone/>
             </a:pPr>
             <a:r>
-              <a:rPr lang="en-US" sz="1400" b="1" dirty="0">
+              <a:rPr lang="en-US" sz="1300" b="1" dirty="0">
+                <a:solidFill>
+                  <a:schemeClr val="accent1"/>
+                </a:solidFill>
+              </a:rPr>
+              <a:t>The decision</a:t>
+            </a:r>
+            <a:endParaRPr lang="en-US" sz="1300" dirty="0"/>
+          </a:p>
+        </p:txBody>
+      </p:sp>
+      <p:sp>
+        <p:nvSpPr>
+          <p:cNvPr id="7" name="Card head"/>
+          <p:cNvSpPr txBox="1"/>
+          <p:nvPr/>
+        </p:nvSpPr>
+        <p:spPr>
+          <a:xfrm>
+            <a:off x="731520" y="2148840"/>
+            <a:ext cx="3149498" cy="576072"/>
+          </a:xfrm>
+          <a:prstGeom prst="rect">
+            <a:avLst/>
+          </a:prstGeom>
+          <a:noFill/>
+          <a:ln/>
+        </p:spPr>
+        <p:txBody>
+          <a:bodyPr wrap="square" lIns="0" tIns="0" rIns="0" bIns="0" rtlCol="0" anchor="t"/>
+          <a:lstStyle/>
+          <a:p>
+            <a:pPr indent="0" marL="0">
+              <a:buNone/>
+            </a:pPr>
+            <a:r>
+              <a:rPr lang="en-US" sz="1600" b="1" dirty="0">
                 <a:solidFill>
                   <a:schemeClr val="tx1"/>
                 </a:solidFill>
-              </a:rPr>
-              <a:t>Deliverable:</a:t>
-            </a:r>
-            <a:r>
-              <a:rPr lang="en-US" sz="1400" dirty="0">
+                <a:latin typeface="Cambria" pitchFamily="34" charset="0"/>
+                <a:ea typeface="Cambria" pitchFamily="34" charset="-122"/>
+                <a:cs typeface="Cambria" pitchFamily="34" charset="-120"/>
+              </a:rPr>
+              <a:t>What each line pays for liquidity</a:t>
+            </a:r>
+            <a:endParaRPr lang="en-US" sz="1600" dirty="0"/>
+          </a:p>
+        </p:txBody>
+      </p:sp>
+      <p:sp>
+        <p:nvSpPr>
+          <p:cNvPr id="8" name="Card text"/>
+          <p:cNvSpPr txBox="1"/>
+          <p:nvPr/>
+        </p:nvSpPr>
+        <p:spPr>
+          <a:xfrm>
+            <a:off x="731520" y="2798064"/>
+            <a:ext cx="3149498" cy="868680"/>
+          </a:xfrm>
+          <a:prstGeom prst="rect">
+            <a:avLst/>
+          </a:prstGeom>
+          <a:noFill/>
+          <a:ln/>
+        </p:spPr>
+        <p:txBody>
+          <a:bodyPr wrap="square" lIns="0" tIns="0" rIns="0" bIns="0" rtlCol="0" anchor="t"/>
+          <a:lstStyle/>
+          <a:p>
+            <a:pPr indent="0" marL="0">
+              <a:buNone/>
+            </a:pPr>
+            <a:r>
+              <a:rPr lang="en-US" sz="1300" dirty="0">
+                <a:solidFill>
+                  <a:schemeClr val="tx2"/>
+                </a:solidFill>
+              </a:rPr>
+              <a:t>Business lines draw on shared funding and on a shared buffer of liquid assets.</a:t>
+            </a:r>
+            <a:endParaRPr lang="en-US" sz="1300" dirty="0"/>
+          </a:p>
+        </p:txBody>
+      </p:sp>
+      <p:sp>
+        <p:nvSpPr>
+          <p:cNvPr id="9" name="Card"/>
+          <p:cNvSpPr/>
+          <p:nvPr/>
+        </p:nvSpPr>
+        <p:spPr>
+          <a:xfrm>
+            <a:off x="4338218" y="1691640"/>
+            <a:ext cx="3515258" cy="2103120"/>
+          </a:xfrm>
+          <a:prstGeom prst="roundRect">
+            <a:avLst>
+              <a:gd name="adj" fmla="val 3478"/>
+            </a:avLst>
+          </a:prstGeom>
+          <a:solidFill>
+            <a:schemeClr val="bg2"/>
+          </a:solidFill>
+          <a:ln w="9525">
+            <a:solidFill>
+              <a:srgbClr val="C4CBD8"/>
+            </a:solidFill>
+            <a:prstDash val="solid"/>
+          </a:ln>
+        </p:spPr>
+      </p:sp>
+      <p:sp>
+        <p:nvSpPr>
+          <p:cNvPr id="10" name="Card label"/>
+          <p:cNvSpPr txBox="1"/>
+          <p:nvPr/>
+        </p:nvSpPr>
+        <p:spPr>
+          <a:xfrm>
+            <a:off x="4521098" y="1819656"/>
+            <a:ext cx="3149498" cy="310896"/>
+          </a:xfrm>
+          <a:prstGeom prst="rect">
+            <a:avLst/>
+          </a:prstGeom>
+          <a:noFill/>
+          <a:ln/>
+        </p:spPr>
+        <p:txBody>
+          <a:bodyPr wrap="square" lIns="0" tIns="0" rIns="0" bIns="0" rtlCol="0" anchor="ctr"/>
+          <a:lstStyle/>
+          <a:p>
+            <a:pPr indent="0" marL="0">
+              <a:buNone/>
+            </a:pPr>
+            <a:r>
+              <a:rPr lang="en-US" sz="1300" b="1" dirty="0">
+                <a:solidFill>
+                  <a:schemeClr val="accent1"/>
+                </a:solidFill>
+              </a:rPr>
+              <a:t>The method</a:t>
+            </a:r>
+            <a:endParaRPr lang="en-US" sz="1300" dirty="0"/>
+          </a:p>
+        </p:txBody>
+      </p:sp>
+      <p:sp>
+        <p:nvSpPr>
+          <p:cNvPr id="11" name="Card head"/>
+          <p:cNvSpPr txBox="1"/>
+          <p:nvPr/>
+        </p:nvSpPr>
+        <p:spPr>
+          <a:xfrm>
+            <a:off x="4521098" y="2148840"/>
+            <a:ext cx="3149498" cy="576072"/>
+          </a:xfrm>
+          <a:prstGeom prst="rect">
+            <a:avLst/>
+          </a:prstGeom>
+          <a:noFill/>
+          <a:ln/>
+        </p:spPr>
+        <p:txBody>
+          <a:bodyPr wrap="square" lIns="0" tIns="0" rIns="0" bIns="0" rtlCol="0" anchor="t"/>
+          <a:lstStyle/>
+          <a:p>
+            <a:pPr indent="0" marL="0">
+              <a:buNone/>
+            </a:pPr>
+            <a:r>
+              <a:rPr lang="en-US" sz="1600" b="1" dirty="0">
                 <a:solidFill>
                   <a:schemeClr val="tx1"/>
                 </a:solidFill>
-              </a:rPr>
-              <a:t> a one-page note to the board: the program, its roadmap with each milestone's reason, its prices, and its certificate chain with the region and the triggers. About 75 minutes.</a:t>
-            </a:r>
-            <a:endParaRPr lang="en-US" sz="1400" dirty="0"/>
+                <a:latin typeface="Cambria" pitchFamily="34" charset="0"/>
+                <a:ea typeface="Cambria" pitchFamily="34" charset="-122"/>
+                <a:cs typeface="Cambria" pitchFamily="34" charset="-120"/>
+              </a:rPr>
+              <a:t>Marginal, maturity-matched prices</a:t>
+            </a:r>
+            <a:endParaRPr lang="en-US" sz="1600" dirty="0"/>
+          </a:p>
+        </p:txBody>
+      </p:sp>
+      <p:sp>
+        <p:nvSpPr>
+          <p:cNvPr id="12" name="Card text"/>
+          <p:cNvSpPr txBox="1"/>
+          <p:nvPr/>
+        </p:nvSpPr>
+        <p:spPr>
+          <a:xfrm>
+            <a:off x="4521098" y="2798064"/>
+            <a:ext cx="3149498" cy="868680"/>
+          </a:xfrm>
+          <a:prstGeom prst="rect">
+            <a:avLst/>
+          </a:prstGeom>
+          <a:noFill/>
+          <a:ln/>
+        </p:spPr>
+        <p:txBody>
+          <a:bodyPr wrap="square" lIns="0" tIns="0" rIns="0" bIns="0" rtlCol="0" anchor="t"/>
+          <a:lstStyle/>
+          <a:p>
+            <a:pPr indent="0" marL="0">
+              <a:buNone/>
+            </a:pPr>
+            <a:r>
+              <a:rPr lang="en-US" sz="1300" dirty="0">
+                <a:solidFill>
+                  <a:schemeClr val="tx2"/>
+                </a:solidFill>
+              </a:rPr>
+              <a:t>Funds transfer pricing, with the buffer's cost charged to the activities that create the need.</a:t>
+            </a:r>
+            <a:endParaRPr lang="en-US" sz="1300" dirty="0"/>
+          </a:p>
+        </p:txBody>
+      </p:sp>
+      <p:sp>
+        <p:nvSpPr>
+          <p:cNvPr id="13" name="Card"/>
+          <p:cNvSpPr/>
+          <p:nvPr/>
+        </p:nvSpPr>
+        <p:spPr>
+          <a:xfrm>
+            <a:off x="8127797" y="1691640"/>
+            <a:ext cx="3515258" cy="2103120"/>
+          </a:xfrm>
+          <a:prstGeom prst="roundRect">
+            <a:avLst>
+              <a:gd name="adj" fmla="val 3478"/>
+            </a:avLst>
+          </a:prstGeom>
+          <a:solidFill>
+            <a:schemeClr val="tx1"/>
+          </a:solidFill>
+          <a:ln w="9525">
+            <a:solidFill>
+              <a:srgbClr val="0F1E3D"/>
+            </a:solidFill>
+            <a:prstDash val="solid"/>
+          </a:ln>
+        </p:spPr>
+      </p:sp>
+      <p:sp>
+        <p:nvSpPr>
+          <p:cNvPr id="14" name="Card label"/>
+          <p:cNvSpPr txBox="1"/>
+          <p:nvPr/>
+        </p:nvSpPr>
+        <p:spPr>
+          <a:xfrm>
+            <a:off x="8310677" y="1819656"/>
+            <a:ext cx="3149498" cy="310896"/>
+          </a:xfrm>
+          <a:prstGeom prst="rect">
+            <a:avLst/>
+          </a:prstGeom>
+          <a:noFill/>
+          <a:ln/>
+        </p:spPr>
+        <p:txBody>
+          <a:bodyPr wrap="square" lIns="0" tIns="0" rIns="0" bIns="0" rtlCol="0" anchor="ctr"/>
+          <a:lstStyle/>
+          <a:p>
+            <a:pPr indent="0" marL="0">
+              <a:buNone/>
+            </a:pPr>
+            <a:r>
+              <a:rPr lang="en-US" sz="1300" b="1" dirty="0">
+                <a:solidFill>
+                  <a:schemeClr val="accent1"/>
+                </a:solidFill>
+              </a:rPr>
+              <a:t>The result</a:t>
+            </a:r>
+            <a:endParaRPr lang="en-US" sz="1300" dirty="0"/>
+          </a:p>
+        </p:txBody>
+      </p:sp>
+      <p:sp>
+        <p:nvSpPr>
+          <p:cNvPr id="15" name="Card head"/>
+          <p:cNvSpPr txBox="1"/>
+          <p:nvPr/>
+        </p:nvSpPr>
+        <p:spPr>
+          <a:xfrm>
+            <a:off x="8310677" y="2148840"/>
+            <a:ext cx="3149498" cy="576072"/>
+          </a:xfrm>
+          <a:prstGeom prst="rect">
+            <a:avLst/>
+          </a:prstGeom>
+          <a:noFill/>
+          <a:ln/>
+        </p:spPr>
+        <p:txBody>
+          <a:bodyPr wrap="square" lIns="0" tIns="0" rIns="0" bIns="0" rtlCol="0" anchor="t"/>
+          <a:lstStyle/>
+          <a:p>
+            <a:pPr indent="0" marL="0">
+              <a:buNone/>
+            </a:pPr>
+            <a:r>
+              <a:rPr lang="en-US" sz="1600" b="1" dirty="0">
+                <a:solidFill>
+                  <a:schemeClr val="bg1"/>
+                </a:solidFill>
+                <a:latin typeface="Cambria" pitchFamily="34" charset="0"/>
+                <a:ea typeface="Cambria" pitchFamily="34" charset="-122"/>
+                <a:cs typeface="Cambria" pitchFamily="34" charset="-120"/>
+              </a:rPr>
+              <a:t>A supervisory expectation</a:t>
+            </a:r>
+            <a:endParaRPr lang="en-US" sz="1600" dirty="0"/>
+          </a:p>
+        </p:txBody>
+      </p:sp>
+      <p:sp>
+        <p:nvSpPr>
+          <p:cNvPr id="16" name="Card text"/>
+          <p:cNvSpPr txBox="1"/>
+          <p:nvPr/>
+        </p:nvSpPr>
+        <p:spPr>
+          <a:xfrm>
+            <a:off x="8310677" y="2798064"/>
+            <a:ext cx="3149498" cy="868680"/>
+          </a:xfrm>
+          <a:prstGeom prst="rect">
+            <a:avLst/>
+          </a:prstGeom>
+          <a:noFill/>
+          <a:ln/>
+        </p:spPr>
+        <p:txBody>
+          <a:bodyPr wrap="square" lIns="0" tIns="0" rIns="0" bIns="0" rtlCol="0" anchor="t"/>
+          <a:lstStyle/>
+          <a:p>
+            <a:pPr indent="0" marL="0">
+              <a:buNone/>
+            </a:pPr>
+            <a:r>
+              <a:rPr lang="en-US" sz="1300" dirty="0">
+                <a:solidFill>
+                  <a:schemeClr val="bg2"/>
+                </a:solidFill>
+              </a:rPr>
+              <a:t>Basel Principle 4 (2008), European guidelines (2010), and U.S. interagency guidance (2016).</a:t>
+            </a:r>
+            <a:endParaRPr lang="en-US" sz="1300" dirty="0"/>
+          </a:p>
+        </p:txBody>
+      </p:sp>
+      <p:sp>
+        <p:nvSpPr>
+          <p:cNvPr id="17" name="Card"/>
+          <p:cNvSpPr/>
+          <p:nvPr/>
+        </p:nvSpPr>
+        <p:spPr>
+          <a:xfrm>
+            <a:off x="548640" y="4069080"/>
+            <a:ext cx="3515258" cy="2103120"/>
+          </a:xfrm>
+          <a:prstGeom prst="roundRect">
+            <a:avLst>
+              <a:gd name="adj" fmla="val 3478"/>
+            </a:avLst>
+          </a:prstGeom>
+          <a:solidFill>
+            <a:schemeClr val="bg2"/>
+          </a:solidFill>
+          <a:ln w="9525">
+            <a:solidFill>
+              <a:srgbClr val="C4CBD8"/>
+            </a:solidFill>
+            <a:prstDash val="solid"/>
+          </a:ln>
+        </p:spPr>
+      </p:sp>
+      <p:sp>
+        <p:nvSpPr>
+          <p:cNvPr id="18" name="Card label"/>
+          <p:cNvSpPr txBox="1"/>
+          <p:nvPr/>
+        </p:nvSpPr>
+        <p:spPr>
+          <a:xfrm>
+            <a:off x="731520" y="4197096"/>
+            <a:ext cx="3149498" cy="310896"/>
+          </a:xfrm>
+          <a:prstGeom prst="rect">
+            <a:avLst/>
+          </a:prstGeom>
+          <a:noFill/>
+          <a:ln/>
+        </p:spPr>
+        <p:txBody>
+          <a:bodyPr wrap="square" lIns="0" tIns="0" rIns="0" bIns="0" rtlCol="0" anchor="ctr"/>
+          <a:lstStyle/>
+          <a:p>
+            <a:pPr indent="0" marL="0">
+              <a:buNone/>
+            </a:pPr>
+            <a:r>
+              <a:rPr lang="en-US" sz="1300" b="1" dirty="0">
+                <a:solidFill>
+                  <a:schemeClr val="accent1"/>
+                </a:solidFill>
+              </a:rPr>
+              <a:t>Making it work</a:t>
+            </a:r>
+            <a:endParaRPr lang="en-US" sz="1300" dirty="0"/>
+          </a:p>
+        </p:txBody>
+      </p:sp>
+      <p:sp>
+        <p:nvSpPr>
+          <p:cNvPr id="19" name="Card head"/>
+          <p:cNvSpPr txBox="1"/>
+          <p:nvPr/>
+        </p:nvSpPr>
+        <p:spPr>
+          <a:xfrm>
+            <a:off x="731520" y="4526280"/>
+            <a:ext cx="3149498" cy="576072"/>
+          </a:xfrm>
+          <a:prstGeom prst="rect">
+            <a:avLst/>
+          </a:prstGeom>
+          <a:noFill/>
+          <a:ln/>
+        </p:spPr>
+        <p:txBody>
+          <a:bodyPr wrap="square" lIns="0" tIns="0" rIns="0" bIns="0" rtlCol="0" anchor="t"/>
+          <a:lstStyle/>
+          <a:p>
+            <a:pPr indent="0" marL="0">
+              <a:buNone/>
+            </a:pPr>
+            <a:r>
+              <a:rPr lang="en-US" sz="1600" b="1" dirty="0">
+                <a:solidFill>
+                  <a:schemeClr val="tx1"/>
+                </a:solidFill>
+                <a:latin typeface="Cambria" pitchFamily="34" charset="0"/>
+                <a:ea typeface="Cambria" pitchFamily="34" charset="-122"/>
+                <a:cs typeface="Cambria" pitchFamily="34" charset="-120"/>
+              </a:rPr>
+              <a:t>Owners, and limits</a:t>
+            </a:r>
+            <a:endParaRPr lang="en-US" sz="1600" dirty="0"/>
+          </a:p>
+        </p:txBody>
+      </p:sp>
+      <p:sp>
+        <p:nvSpPr>
+          <p:cNvPr id="20" name="Card text"/>
+          <p:cNvSpPr txBox="1"/>
+          <p:nvPr/>
+        </p:nvSpPr>
+        <p:spPr>
+          <a:xfrm>
+            <a:off x="731520" y="5175504"/>
+            <a:ext cx="3149498" cy="868680"/>
+          </a:xfrm>
+          <a:prstGeom prst="rect">
+            <a:avLst/>
+          </a:prstGeom>
+          <a:noFill/>
+          <a:ln/>
+        </p:spPr>
+        <p:txBody>
+          <a:bodyPr wrap="square" lIns="0" tIns="0" rIns="0" bIns="0" rtlCol="0" anchor="t"/>
+          <a:lstStyle/>
+          <a:p>
+            <a:pPr indent="0" marL="0">
+              <a:buNone/>
+            </a:pPr>
+            <a:r>
+              <a:rPr lang="en-US" sz="1300" dirty="0">
+                <a:solidFill>
+                  <a:schemeClr val="tx2"/>
+                </a:solidFill>
+              </a:rPr>
+              <a:t>A central function owns the prices; desks with their own funding sources needed limits as well.</a:t>
+            </a:r>
+            <a:endParaRPr lang="en-US" sz="1300" dirty="0"/>
+          </a:p>
+        </p:txBody>
+      </p:sp>
+      <p:sp>
+        <p:nvSpPr>
+          <p:cNvPr id="21" name="Card"/>
+          <p:cNvSpPr/>
+          <p:nvPr/>
+        </p:nvSpPr>
+        <p:spPr>
+          <a:xfrm>
+            <a:off x="4338218" y="4069080"/>
+            <a:ext cx="3515258" cy="2103120"/>
+          </a:xfrm>
+          <a:prstGeom prst="roundRect">
+            <a:avLst>
+              <a:gd name="adj" fmla="val 3478"/>
+            </a:avLst>
+          </a:prstGeom>
+          <a:solidFill>
+            <a:schemeClr val="bg2"/>
+          </a:solidFill>
+          <a:ln w="9525">
+            <a:solidFill>
+              <a:srgbClr val="C4CBD8"/>
+            </a:solidFill>
+            <a:prstDash val="solid"/>
+          </a:ln>
+        </p:spPr>
+      </p:sp>
+      <p:sp>
+        <p:nvSpPr>
+          <p:cNvPr id="22" name="Card label"/>
+          <p:cNvSpPr txBox="1"/>
+          <p:nvPr/>
+        </p:nvSpPr>
+        <p:spPr>
+          <a:xfrm>
+            <a:off x="4521098" y="4197096"/>
+            <a:ext cx="3149498" cy="310896"/>
+          </a:xfrm>
+          <a:prstGeom prst="rect">
+            <a:avLst/>
+          </a:prstGeom>
+          <a:noFill/>
+          <a:ln/>
+        </p:spPr>
+        <p:txBody>
+          <a:bodyPr wrap="square" lIns="0" tIns="0" rIns="0" bIns="0" rtlCol="0" anchor="ctr"/>
+          <a:lstStyle/>
+          <a:p>
+            <a:pPr indent="0" marL="0">
+              <a:buNone/>
+            </a:pPr>
+            <a:r>
+              <a:rPr lang="en-US" sz="1300" b="1" dirty="0">
+                <a:solidFill>
+                  <a:schemeClr val="accent1"/>
+                </a:solidFill>
+              </a:rPr>
+              <a:t>What Meridian takes</a:t>
+            </a:r>
+            <a:endParaRPr lang="en-US" sz="1300" dirty="0"/>
+          </a:p>
+        </p:txBody>
+      </p:sp>
+      <p:sp>
+        <p:nvSpPr>
+          <p:cNvPr id="23" name="Card head"/>
+          <p:cNvSpPr txBox="1"/>
+          <p:nvPr/>
+        </p:nvSpPr>
+        <p:spPr>
+          <a:xfrm>
+            <a:off x="4521098" y="4526280"/>
+            <a:ext cx="3149498" cy="576072"/>
+          </a:xfrm>
+          <a:prstGeom prst="rect">
+            <a:avLst/>
+          </a:prstGeom>
+          <a:noFill/>
+          <a:ln/>
+        </p:spPr>
+        <p:txBody>
+          <a:bodyPr wrap="square" lIns="0" tIns="0" rIns="0" bIns="0" rtlCol="0" anchor="t"/>
+          <a:lstStyle/>
+          <a:p>
+            <a:pPr indent="0" marL="0">
+              <a:buNone/>
+            </a:pPr>
+            <a:r>
+              <a:rPr lang="en-US" sz="1600" b="1" dirty="0">
+                <a:solidFill>
+                  <a:schemeClr val="tx1"/>
+                </a:solidFill>
+                <a:latin typeface="Cambria" pitchFamily="34" charset="0"/>
+                <a:ea typeface="Cambria" pitchFamily="34" charset="-122"/>
+                <a:cs typeface="Cambria" pitchFamily="34" charset="-120"/>
+              </a:rPr>
+              <a:t>One program, priced</a:t>
+            </a:r>
+            <a:endParaRPr lang="en-US" sz="1600" dirty="0"/>
+          </a:p>
+        </p:txBody>
+      </p:sp>
+      <p:sp>
+        <p:nvSpPr>
+          <p:cNvPr id="24" name="Card text"/>
+          <p:cNvSpPr txBox="1"/>
+          <p:nvPr/>
+        </p:nvSpPr>
+        <p:spPr>
+          <a:xfrm>
+            <a:off x="4521098" y="5175504"/>
+            <a:ext cx="3149498" cy="868680"/>
+          </a:xfrm>
+          <a:prstGeom prst="rect">
+            <a:avLst/>
+          </a:prstGeom>
+          <a:noFill/>
+          <a:ln/>
+        </p:spPr>
+        <p:txBody>
+          <a:bodyPr wrap="square" lIns="0" tIns="0" rIns="0" bIns="0" rtlCol="0" anchor="t"/>
+          <a:lstStyle/>
+          <a:p>
+            <a:pPr indent="0" marL="0">
+              <a:buNone/>
+            </a:pPr>
+            <a:r>
+              <a:rPr lang="en-US" sz="1300" dirty="0">
+                <a:solidFill>
+                  <a:schemeClr val="tx2"/>
+                </a:solidFill>
+              </a:rPr>
+              <a:t>Worked Example 16.1: pieces certified alone breached the floor three times in four together.</a:t>
+            </a:r>
+            <a:endParaRPr lang="en-US" sz="1300" dirty="0"/>
+          </a:p>
+        </p:txBody>
+      </p:sp>
+      <p:sp>
+        <p:nvSpPr>
+          <p:cNvPr id="25" name="Card"/>
+          <p:cNvSpPr/>
+          <p:nvPr/>
+        </p:nvSpPr>
+        <p:spPr>
+          <a:xfrm>
+            <a:off x="8127797" y="4069080"/>
+            <a:ext cx="3515258" cy="2103120"/>
+          </a:xfrm>
+          <a:prstGeom prst="roundRect">
+            <a:avLst>
+              <a:gd name="adj" fmla="val 3478"/>
+            </a:avLst>
+          </a:prstGeom>
+          <a:solidFill>
+            <a:schemeClr val="bg2"/>
+          </a:solidFill>
+          <a:ln w="9525">
+            <a:solidFill>
+              <a:srgbClr val="C4CBD8"/>
+            </a:solidFill>
+            <a:prstDash val="solid"/>
+          </a:ln>
+        </p:spPr>
+      </p:sp>
+      <p:sp>
+        <p:nvSpPr>
+          <p:cNvPr id="26" name="Card label"/>
+          <p:cNvSpPr txBox="1"/>
+          <p:nvPr/>
+        </p:nvSpPr>
+        <p:spPr>
+          <a:xfrm>
+            <a:off x="8310677" y="4197096"/>
+            <a:ext cx="3149498" cy="310896"/>
+          </a:xfrm>
+          <a:prstGeom prst="rect">
+            <a:avLst/>
+          </a:prstGeom>
+          <a:noFill/>
+          <a:ln/>
+        </p:spPr>
+        <p:txBody>
+          <a:bodyPr wrap="square" lIns="0" tIns="0" rIns="0" bIns="0" rtlCol="0" anchor="ctr"/>
+          <a:lstStyle/>
+          <a:p>
+            <a:pPr indent="0" marL="0">
+              <a:buNone/>
+            </a:pPr>
+            <a:r>
+              <a:rPr lang="en-US" sz="1300" b="1" dirty="0">
+                <a:solidFill>
+                  <a:schemeClr val="accent1"/>
+                </a:solidFill>
+              </a:rPr>
+              <a:t>For the board</a:t>
+            </a:r>
+            <a:endParaRPr lang="en-US" sz="1300" dirty="0"/>
+          </a:p>
+        </p:txBody>
+      </p:sp>
+      <p:sp>
+        <p:nvSpPr>
+          <p:cNvPr id="27" name="Card head"/>
+          <p:cNvSpPr txBox="1"/>
+          <p:nvPr/>
+        </p:nvSpPr>
+        <p:spPr>
+          <a:xfrm>
+            <a:off x="8310677" y="4526280"/>
+            <a:ext cx="3149498" cy="576072"/>
+          </a:xfrm>
+          <a:prstGeom prst="rect">
+            <a:avLst/>
+          </a:prstGeom>
+          <a:noFill/>
+          <a:ln/>
+        </p:spPr>
+        <p:txBody>
+          <a:bodyPr wrap="square" lIns="0" tIns="0" rIns="0" bIns="0" rtlCol="0" anchor="t"/>
+          <a:lstStyle/>
+          <a:p>
+            <a:pPr indent="0" marL="0">
+              <a:buNone/>
+            </a:pPr>
+            <a:r>
+              <a:rPr lang="en-US" sz="1600" b="1" dirty="0">
+                <a:solidFill>
+                  <a:schemeClr val="tx1"/>
+                </a:solidFill>
+                <a:latin typeface="Cambria" pitchFamily="34" charset="0"/>
+                <a:ea typeface="Cambria" pitchFamily="34" charset="-122"/>
+                <a:cs typeface="Cambria" pitchFamily="34" charset="-120"/>
+              </a:rPr>
+              <a:t>What does each unit pay?</a:t>
+            </a:r>
+            <a:endParaRPr lang="en-US" sz="1600" dirty="0"/>
+          </a:p>
+        </p:txBody>
+      </p:sp>
+      <p:sp>
+        <p:nvSpPr>
+          <p:cNvPr id="28" name="Card text"/>
+          <p:cNvSpPr txBox="1"/>
+          <p:nvPr/>
+        </p:nvSpPr>
+        <p:spPr>
+          <a:xfrm>
+            <a:off x="8310677" y="5175504"/>
+            <a:ext cx="3149498" cy="868680"/>
+          </a:xfrm>
+          <a:prstGeom prst="rect">
+            <a:avLst/>
+          </a:prstGeom>
+          <a:noFill/>
+          <a:ln/>
+        </p:spPr>
+        <p:txBody>
+          <a:bodyPr wrap="square" lIns="0" tIns="0" rIns="0" bIns="0" rtlCol="0" anchor="t"/>
+          <a:lstStyle/>
+          <a:p>
+            <a:pPr indent="0" marL="0">
+              <a:buNone/>
+            </a:pPr>
+            <a:r>
+              <a:rPr lang="en-US" sz="1300" dirty="0">
+                <a:solidFill>
+                  <a:schemeClr val="tx2"/>
+                </a:solidFill>
+              </a:rPr>
+              <a:t>Is the price the marginal value of the stock to the whole firm, or a convenient average?</a:t>
+            </a:r>
+            <a:endParaRPr lang="en-US" sz="1300" dirty="0"/>
           </a:p>
         </p:txBody>
       </p:sp>
@@ -16448,7 +16521,7 @@
                   <a:schemeClr val="accent1"/>
                 </a:solidFill>
               </a:rPr>
-              <a:t>KEY TAKEAWAYS</a:t>
+              <a:t>AXIOM LAB 2.16 · MODULE AXIOM-16</a:t>
             </a:r>
             <a:endParaRPr lang="en-US" sz="1200" dirty="0"/>
           </a:p>
@@ -16489,22 +16562,105 @@
                 <a:ea typeface="Cambria" pitchFamily="34" charset="-122"/>
                 <a:cs typeface="Cambria" pitchFamily="34" charset="-120"/>
               </a:rPr>
-              <a:t>What to carry forward</a:t>
+              <a:t>Check, order, price, certify, in AXIOM</a:t>
             </a:r>
             <a:endParaRPr lang="en-US" sz="3200" dirty="0"/>
           </a:p>
         </p:txBody>
       </p:sp>
-      <p:sp>
-        <p:nvSpPr>
-          <p:cNvPr id="5" name="Number"/>
+      <p:pic>
+        <p:nvPicPr>
+          <p:cNvPr id="5" name="AXIOM logo" descr="AXIOM">    </p:cNvPr>
+          <p:cNvPicPr>
+            <a:picLocks noChangeAspect="1"/>
+          </p:cNvPicPr>
+          <p:nvPr/>
+        </p:nvPicPr>
+        <p:blipFill>
+          <a:blip r:embed="rId1"/>
+          <a:stretch>
+            <a:fillRect/>
+          </a:stretch>
+        </p:blipFill>
+        <p:spPr>
+          <a:xfrm>
+            <a:off x="9539935" y="310896"/>
+            <a:ext cx="2103120" cy="420624"/>
+          </a:xfrm>
+          <a:prstGeom prst="rect">
+            <a:avLst/>
+          </a:prstGeom>
+        </p:spPr>
+      </p:pic>
+      <p:sp>
+        <p:nvSpPr>
+          <p:cNvPr id="6" name="Situation"/>
+          <p:cNvSpPr txBox="1"/>
+          <p:nvPr/>
+        </p:nvSpPr>
+        <p:spPr>
+          <a:xfrm>
+            <a:off x="548640" y="1645920"/>
+            <a:ext cx="11094415" cy="777240"/>
+          </a:xfrm>
+          <a:prstGeom prst="rect">
+            <a:avLst/>
+          </a:prstGeom>
+          <a:noFill/>
+          <a:ln/>
+        </p:spPr>
+        <p:txBody>
+          <a:bodyPr wrap="square" lIns="0" tIns="0" rIns="0" bIns="0" rtlCol="0" anchor="t"/>
+          <a:lstStyle/>
+          <a:p>
+            <a:pPr indent="0" marL="0">
+              <a:buNone/>
+            </a:pPr>
+            <a:r>
+              <a:rPr lang="en-US" sz="1500" dirty="0">
+                <a:solidFill>
+                  <a:schemeClr val="tx1"/>
+                </a:solidFill>
+              </a:rPr>
+              <a:t>Meridian's board wants to sign one program: the sale, the build with its financing, and the automation rounds with their payouts. The CFO asks whether the pieces fit together, in what order, at what cost, and on what terms. Open AXIOM, choose Lab 2.16 and load Meridian's program.</a:t>
+            </a:r>
+            <a:endParaRPr lang="en-US" sz="1500" dirty="0"/>
+          </a:p>
+        </p:txBody>
+      </p:sp>
+      <p:sp>
+        <p:nvSpPr>
+          <p:cNvPr id="7" name="Flow line"/>
           <p:cNvSpPr/>
           <p:nvPr/>
         </p:nvSpPr>
         <p:spPr>
           <a:xfrm>
-            <a:off x="548640" y="1737360"/>
-            <a:ext cx="566928" cy="566928"/>
+            <a:off x="1658082" y="2880360"/>
+            <a:ext cx="8875532" cy="0"/>
+          </a:xfrm>
+          <a:prstGeom prst="line">
+            <a:avLst/>
+          </a:prstGeom>
+          <a:noFill/>
+          <a:ln w="25400">
+            <a:solidFill>
+              <a:srgbClr val="C4CBD8"/>
+            </a:solidFill>
+            <a:prstDash val="solid"/>
+          </a:ln>
+        </p:spPr>
+      </p:sp>
+      <p:sp>
+        <p:nvSpPr>
+          <p:cNvPr id="8" name="Number"/>
+          <p:cNvSpPr/>
+          <p:nvPr/>
+        </p:nvSpPr>
+        <p:spPr>
+          <a:xfrm>
+            <a:off x="1383762" y="2606040"/>
+            <a:ext cx="548640" cy="548640"/>
           </a:xfrm>
           <a:prstGeom prst="ellipse">
             <a:avLst/>
@@ -16522,14 +16678,14 @@
       </p:sp>
       <p:sp>
         <p:nvSpPr>
-          <p:cNvPr id="6" name="Text 3"/>
+          <p:cNvPr id="9" name="Text 5"/>
           <p:cNvSpPr txBox="1"/>
           <p:nvPr/>
         </p:nvSpPr>
         <p:spPr>
           <a:xfrm>
-            <a:off x="548640" y="1737360"/>
-            <a:ext cx="566928" cy="566928"/>
+            <a:off x="1383762" y="2606040"/>
+            <a:ext cx="548640" cy="548640"/>
           </a:xfrm>
           <a:prstGeom prst="rect">
             <a:avLst/>
@@ -16545,7 +16701,7 @@
               <a:buNone/>
             </a:pPr>
             <a:r>
-              <a:rPr lang="en-US" sz="1500" b="1" dirty="0">
+              <a:rPr lang="en-US" sz="1600" b="1" dirty="0">
                 <a:solidFill>
                   <a:schemeClr val="bg1"/>
                 </a:solidFill>
@@ -16555,20 +16711,20 @@
               </a:rPr>
               <a:t>1</a:t>
             </a:r>
-            <a:endParaRPr lang="en-US" sz="1500" dirty="0"/>
-          </a:p>
-        </p:txBody>
-      </p:sp>
-      <p:sp>
-        <p:nvSpPr>
-          <p:cNvPr id="7" name="Row text"/>
+            <a:endParaRPr lang="en-US" sz="1600" dirty="0"/>
+          </a:p>
+        </p:txBody>
+      </p:sp>
+      <p:sp>
+        <p:nvSpPr>
+          <p:cNvPr id="10" name="Flow head"/>
           <p:cNvSpPr txBox="1"/>
           <p:nvPr/>
         </p:nvSpPr>
         <p:spPr>
           <a:xfrm>
-            <a:off x="1325880" y="1691640"/>
-            <a:ext cx="10317175" cy="841248"/>
+            <a:off x="621792" y="3291840"/>
+            <a:ext cx="2072579" cy="548640"/>
           </a:xfrm>
           <a:prstGeom prst="rect">
             <a:avLst/>
@@ -16577,34 +16733,73 @@
           <a:ln/>
         </p:spPr>
         <p:txBody>
-          <a:bodyPr wrap="square" lIns="0" tIns="0" rIns="0" bIns="0" rtlCol="0" anchor="ctr"/>
+          <a:bodyPr wrap="square" lIns="0" tIns="0" rIns="0" bIns="0" rtlCol="0" anchor="t"/>
           <a:lstStyle/>
           <a:p>
-            <a:pPr indent="0" marL="0">
+            <a:pPr algn="ctr" indent="0" marL="0">
               <a:buNone/>
             </a:pPr>
             <a:r>
-              <a:rPr lang="en-US" sz="1500" dirty="0">
+              <a:rPr lang="en-US" sz="1600" b="1" dirty="0">
                 <a:solidFill>
                   <a:schemeClr val="tx1"/>
                 </a:solidFill>
-              </a:rPr>
-              <a:t>Pieces that share a stock are one program: certify the sum of their claims, not each piece on the whole room.</a:t>
-            </a:r>
-            <a:endParaRPr lang="en-US" sz="1500" dirty="0"/>
-          </a:p>
-        </p:txBody>
-      </p:sp>
-      <p:sp>
-        <p:nvSpPr>
-          <p:cNvPr id="8" name="Number"/>
+                <a:latin typeface="Cambria" pitchFamily="34" charset="0"/>
+                <a:ea typeface="Cambria" pitchFamily="34" charset="-122"/>
+                <a:cs typeface="Cambria" pitchFamily="34" charset="-120"/>
+              </a:rPr>
+              <a:t>Check jointly</a:t>
+            </a:r>
+            <a:endParaRPr lang="en-US" sz="1600" dirty="0"/>
+          </a:p>
+        </p:txBody>
+      </p:sp>
+      <p:sp>
+        <p:nvSpPr>
+          <p:cNvPr id="11" name="Flow text"/>
+          <p:cNvSpPr txBox="1"/>
+          <p:nvPr/>
+        </p:nvSpPr>
+        <p:spPr>
+          <a:xfrm>
+            <a:off x="640080" y="3867912"/>
+            <a:ext cx="2036003" cy="1554480"/>
+          </a:xfrm>
+          <a:prstGeom prst="rect">
+            <a:avLst/>
+          </a:prstGeom>
+          <a:noFill/>
+          <a:ln/>
+        </p:spPr>
+        <p:txBody>
+          <a:bodyPr wrap="square" lIns="0" tIns="0" rIns="0" bIns="0" rtlCol="0" anchor="t"/>
+          <a:lstStyle/>
+          <a:p>
+            <a:pPr algn="ctr" indent="0" marL="0">
+              <a:buNone/>
+            </a:pPr>
+            <a:r>
+              <a:rPr lang="en-US" sz="1400" dirty="0">
+                <a:solidFill>
+                  <a:schemeClr val="tx2"/>
+                </a:solidFill>
+              </a:rPr>
+              <a:t>Sign Chapter 5's plan and Volume I's package together; read the breach chance and the claims.</a:t>
+            </a:r>
+            <a:endParaRPr lang="en-US" sz="1400" dirty="0"/>
+          </a:p>
+        </p:txBody>
+      </p:sp>
+      <p:sp>
+        <p:nvSpPr>
+          <p:cNvPr id="12" name="Number"/>
           <p:cNvSpPr/>
           <p:nvPr/>
         </p:nvSpPr>
         <p:spPr>
           <a:xfrm>
-            <a:off x="548640" y="2633472"/>
-            <a:ext cx="566928" cy="566928"/>
+            <a:off x="3602645" y="2606040"/>
+            <a:ext cx="548640" cy="548640"/>
           </a:xfrm>
           <a:prstGeom prst="ellipse">
             <a:avLst/>
@@ -16622,14 +16817,14 @@
       </p:sp>
       <p:sp>
         <p:nvSpPr>
-          <p:cNvPr id="9" name="Text 6"/>
+          <p:cNvPr id="13" name="Text 9"/>
           <p:cNvSpPr txBox="1"/>
           <p:nvPr/>
         </p:nvSpPr>
         <p:spPr>
           <a:xfrm>
-            <a:off x="548640" y="2633472"/>
-            <a:ext cx="566928" cy="566928"/>
+            <a:off x="3602645" y="2606040"/>
+            <a:ext cx="548640" cy="548640"/>
           </a:xfrm>
           <a:prstGeom prst="rect">
             <a:avLst/>
@@ -16645,7 +16840,7 @@
               <a:buNone/>
             </a:pPr>
             <a:r>
-              <a:rPr lang="en-US" sz="1500" b="1" dirty="0">
+              <a:rPr lang="en-US" sz="1600" b="1" dirty="0">
                 <a:solidFill>
                   <a:schemeClr val="bg1"/>
                 </a:solidFill>
@@ -16655,20 +16850,20 @@
               </a:rPr>
               <a:t>2</a:t>
             </a:r>
-            <a:endParaRPr lang="en-US" sz="1500" dirty="0"/>
-          </a:p>
-        </p:txBody>
-      </p:sp>
-      <p:sp>
-        <p:nvSpPr>
-          <p:cNvPr id="10" name="Row text"/>
+            <a:endParaRPr lang="en-US" sz="1600" dirty="0"/>
+          </a:p>
+        </p:txBody>
+      </p:sp>
+      <p:sp>
+        <p:nvSpPr>
+          <p:cNvPr id="14" name="Flow head"/>
           <p:cNvSpPr txBox="1"/>
           <p:nvPr/>
         </p:nvSpPr>
         <p:spPr>
           <a:xfrm>
-            <a:off x="1325880" y="2587752"/>
-            <a:ext cx="10317175" cy="841248"/>
+            <a:off x="2840675" y="3291840"/>
+            <a:ext cx="2072579" cy="548640"/>
           </a:xfrm>
           <a:prstGeom prst="rect">
             <a:avLst/>
@@ -16677,34 +16872,73 @@
           <a:ln/>
         </p:spPr>
         <p:txBody>
-          <a:bodyPr wrap="square" lIns="0" tIns="0" rIns="0" bIns="0" rtlCol="0" anchor="ctr"/>
+          <a:bodyPr wrap="square" lIns="0" tIns="0" rIns="0" bIns="0" rtlCol="0" anchor="t"/>
           <a:lstStyle/>
           <a:p>
-            <a:pPr indent="0" marL="0">
+            <a:pPr algn="ctr" indent="0" marL="0">
               <a:buNone/>
             </a:pPr>
             <a:r>
-              <a:rPr lang="en-US" sz="1500" dirty="0">
+              <a:rPr lang="en-US" sz="1600" b="1" dirty="0">
                 <a:solidFill>
                   <a:schemeClr val="tx1"/>
                 </a:solidFill>
-              </a:rPr>
-              <a:t>Prices on the shared stocks split the program among its owners, and every use of a stock is judged against its price; levers are bought at about the appetite's price and uses that earn less wait.</a:t>
-            </a:r>
-            <a:endParaRPr lang="en-US" sz="1500" dirty="0"/>
-          </a:p>
-        </p:txBody>
-      </p:sp>
-      <p:sp>
-        <p:nvSpPr>
-          <p:cNvPr id="11" name="Number"/>
+                <a:latin typeface="Cambria" pitchFamily="34" charset="0"/>
+                <a:ea typeface="Cambria" pitchFamily="34" charset="-122"/>
+                <a:cs typeface="Cambria" pitchFamily="34" charset="-120"/>
+              </a:rPr>
+              <a:t>Order</a:t>
+            </a:r>
+            <a:endParaRPr lang="en-US" sz="1600" dirty="0"/>
+          </a:p>
+        </p:txBody>
+      </p:sp>
+      <p:sp>
+        <p:nvSpPr>
+          <p:cNvPr id="15" name="Flow text"/>
+          <p:cNvSpPr txBox="1"/>
+          <p:nvPr/>
+        </p:nvSpPr>
+        <p:spPr>
+          <a:xfrm>
+            <a:off x="2858963" y="3867912"/>
+            <a:ext cx="2036003" cy="1554480"/>
+          </a:xfrm>
+          <a:prstGeom prst="rect">
+            <a:avLst/>
+          </a:prstGeom>
+          <a:noFill/>
+          <a:ln/>
+        </p:spPr>
+        <p:txBody>
+          <a:bodyPr wrap="square" lIns="0" tIns="0" rIns="0" bIns="0" rtlCol="0" anchor="t"/>
+          <a:lstStyle/>
+          <a:p>
+            <a:pPr algn="ctr" indent="0" marL="0">
+              <a:buNone/>
+            </a:pPr>
+            <a:r>
+              <a:rPr lang="en-US" sz="1400" dirty="0">
+                <a:solidFill>
+                  <a:schemeClr val="tx2"/>
+                </a:solidFill>
+              </a:rPr>
+              <a:t>Move the sale before and after the build, and the rounds across years; price each order.</a:t>
+            </a:r>
+            <a:endParaRPr lang="en-US" sz="1400" dirty="0"/>
+          </a:p>
+        </p:txBody>
+      </p:sp>
+      <p:sp>
+        <p:nvSpPr>
+          <p:cNvPr id="16" name="Number"/>
           <p:cNvSpPr/>
           <p:nvPr/>
         </p:nvSpPr>
         <p:spPr>
           <a:xfrm>
-            <a:off x="548640" y="3529584"/>
-            <a:ext cx="566928" cy="566928"/>
+            <a:off x="5821528" y="2606040"/>
+            <a:ext cx="548640" cy="548640"/>
           </a:xfrm>
           <a:prstGeom prst="ellipse">
             <a:avLst/>
@@ -16722,14 +16956,14 @@
       </p:sp>
       <p:sp>
         <p:nvSpPr>
-          <p:cNvPr id="12" name="Text 9"/>
+          <p:cNvPr id="17" name="Text 13"/>
           <p:cNvSpPr txBox="1"/>
           <p:nvPr/>
         </p:nvSpPr>
         <p:spPr>
           <a:xfrm>
-            <a:off x="548640" y="3529584"/>
-            <a:ext cx="566928" cy="566928"/>
+            <a:off x="5821528" y="2606040"/>
+            <a:ext cx="548640" cy="548640"/>
           </a:xfrm>
           <a:prstGeom prst="rect">
             <a:avLst/>
@@ -16745,7 +16979,7 @@
               <a:buNone/>
             </a:pPr>
             <a:r>
-              <a:rPr lang="en-US" sz="1500" b="1" dirty="0">
+              <a:rPr lang="en-US" sz="1600" b="1" dirty="0">
                 <a:solidFill>
                   <a:schemeClr val="bg1"/>
                 </a:solidFill>
@@ -16755,20 +16989,20 @@
               </a:rPr>
               <a:t>3</a:t>
             </a:r>
-            <a:endParaRPr lang="en-US" sz="1500" dirty="0"/>
-          </a:p>
-        </p:txBody>
-      </p:sp>
-      <p:sp>
-        <p:nvSpPr>
-          <p:cNvPr id="13" name="Row text"/>
+            <a:endParaRPr lang="en-US" sz="1600" dirty="0"/>
+          </a:p>
+        </p:txBody>
+      </p:sp>
+      <p:sp>
+        <p:nvSpPr>
+          <p:cNvPr id="18" name="Flow head"/>
           <p:cNvSpPr txBox="1"/>
           <p:nvPr/>
         </p:nvSpPr>
         <p:spPr>
           <a:xfrm>
-            <a:off x="1325880" y="3483864"/>
-            <a:ext cx="10317175" cy="841248"/>
+            <a:off x="5059558" y="3291840"/>
+            <a:ext cx="2072579" cy="548640"/>
           </a:xfrm>
           <a:prstGeom prst="rect">
             <a:avLst/>
@@ -16777,34 +17011,73 @@
           <a:ln/>
         </p:spPr>
         <p:txBody>
-          <a:bodyPr wrap="square" lIns="0" tIns="0" rIns="0" bIns="0" rtlCol="0" anchor="ctr"/>
+          <a:bodyPr wrap="square" lIns="0" tIns="0" rIns="0" bIns="0" rtlCol="0" anchor="t"/>
           <a:lstStyle/>
           <a:p>
-            <a:pPr indent="0" marL="0">
+            <a:pPr algn="ctr" indent="0" marL="0">
               <a:buNone/>
             </a:pPr>
             <a:r>
-              <a:rPr lang="en-US" sz="1500" dirty="0">
+              <a:rPr lang="en-US" sz="1600" b="1" dirty="0">
                 <a:solidFill>
                   <a:schemeClr val="tx1"/>
                 </a:solidFill>
-              </a:rPr>
-              <a:t>Order and timing are computed: what only adds goes first, a feedback core is phased so every phase is stable, and an irreversible move is worth keeping open when its best timing depends on what will be read.</a:t>
-            </a:r>
-            <a:endParaRPr lang="en-US" sz="1500" dirty="0"/>
-          </a:p>
-        </p:txBody>
-      </p:sp>
-      <p:sp>
-        <p:nvSpPr>
-          <p:cNvPr id="14" name="Number"/>
+                <a:latin typeface="Cambria" pitchFamily="34" charset="0"/>
+                <a:ea typeface="Cambria" pitchFamily="34" charset="-122"/>
+                <a:cs typeface="Cambria" pitchFamily="34" charset="-120"/>
+              </a:rPr>
+              <a:t>Price</a:t>
+            </a:r>
+            <a:endParaRPr lang="en-US" sz="1600" dirty="0"/>
+          </a:p>
+        </p:txBody>
+      </p:sp>
+      <p:sp>
+        <p:nvSpPr>
+          <p:cNvPr id="19" name="Flow text"/>
+          <p:cNvSpPr txBox="1"/>
+          <p:nvPr/>
+        </p:nvSpPr>
+        <p:spPr>
+          <a:xfrm>
+            <a:off x="5077846" y="3867912"/>
+            <a:ext cx="2036003" cy="1554480"/>
+          </a:xfrm>
+          <a:prstGeom prst="rect">
+            <a:avLst/>
+          </a:prstGeom>
+          <a:noFill/>
+          <a:ln/>
+        </p:spPr>
+        <p:txBody>
+          <a:bodyPr wrap="square" lIns="0" tIns="0" rIns="0" bIns="0" rtlCol="0" anchor="t"/>
+          <a:lstStyle/>
+          <a:p>
+            <a:pPr algn="ctr" indent="0" marL="0">
+              <a:buNone/>
+            </a:pPr>
+            <a:r>
+              <a:rPr lang="en-US" sz="1400" dirty="0">
+                <a:solidFill>
+                  <a:schemeClr val="tx2"/>
+                </a:solidFill>
+              </a:rPr>
+              <a:t>Read the appetite's price and each lever's cost per point of chance; hold or release the payouts.</a:t>
+            </a:r>
+            <a:endParaRPr lang="en-US" sz="1400" dirty="0"/>
+          </a:p>
+        </p:txBody>
+      </p:sp>
+      <p:sp>
+        <p:nvSpPr>
+          <p:cNvPr id="20" name="Number"/>
           <p:cNvSpPr/>
           <p:nvPr/>
         </p:nvSpPr>
         <p:spPr>
           <a:xfrm>
-            <a:off x="548640" y="4425696"/>
-            <a:ext cx="566928" cy="566928"/>
+            <a:off x="8040411" y="2606040"/>
+            <a:ext cx="548640" cy="548640"/>
           </a:xfrm>
           <a:prstGeom prst="ellipse">
             <a:avLst/>
@@ -16822,14 +17095,14 @@
       </p:sp>
       <p:sp>
         <p:nvSpPr>
-          <p:cNvPr id="15" name="Text 12"/>
+          <p:cNvPr id="21" name="Text 17"/>
           <p:cNvSpPr txBox="1"/>
           <p:nvPr/>
         </p:nvSpPr>
         <p:spPr>
           <a:xfrm>
-            <a:off x="548640" y="4425696"/>
-            <a:ext cx="566928" cy="566928"/>
+            <a:off x="8040411" y="2606040"/>
+            <a:ext cx="548640" cy="548640"/>
           </a:xfrm>
           <a:prstGeom prst="rect">
             <a:avLst/>
@@ -16845,7 +17118,7 @@
               <a:buNone/>
             </a:pPr>
             <a:r>
-              <a:rPr lang="en-US" sz="1500" b="1" dirty="0">
+              <a:rPr lang="en-US" sz="1600" b="1" dirty="0">
                 <a:solidFill>
                   <a:schemeClr val="bg1"/>
                 </a:solidFill>
@@ -16855,20 +17128,20 @@
               </a:rPr>
               <a:t>4</a:t>
             </a:r>
-            <a:endParaRPr lang="en-US" sz="1500" dirty="0"/>
-          </a:p>
-        </p:txBody>
-      </p:sp>
-      <p:sp>
-        <p:nvSpPr>
-          <p:cNvPr id="16" name="Row text"/>
+            <a:endParaRPr lang="en-US" sz="1600" dirty="0"/>
+          </a:p>
+        </p:txBody>
+      </p:sp>
+      <p:sp>
+        <p:nvSpPr>
+          <p:cNvPr id="22" name="Flow head"/>
           <p:cNvSpPr txBox="1"/>
           <p:nvPr/>
         </p:nvSpPr>
         <p:spPr>
           <a:xfrm>
-            <a:off x="1325880" y="4379976"/>
-            <a:ext cx="10317175" cy="841248"/>
+            <a:off x="7278441" y="3291840"/>
+            <a:ext cx="2072579" cy="548640"/>
           </a:xfrm>
           <a:prstGeom prst="rect">
             <a:avLst/>
@@ -16877,34 +17150,73 @@
           <a:ln/>
         </p:spPr>
         <p:txBody>
-          <a:bodyPr wrap="square" lIns="0" tIns="0" rIns="0" bIns="0" rtlCol="0" anchor="ctr"/>
+          <a:bodyPr wrap="square" lIns="0" tIns="0" rIns="0" bIns="0" rtlCol="0" anchor="t"/>
           <a:lstStyle/>
           <a:p>
-            <a:pPr indent="0" marL="0">
+            <a:pPr algn="ctr" indent="0" marL="0">
               <a:buNone/>
             </a:pPr>
             <a:r>
-              <a:rPr lang="en-US" sz="1500" dirty="0">
+              <a:rPr lang="en-US" sz="1600" b="1" dirty="0">
                 <a:solidFill>
                   <a:schemeClr val="tx1"/>
                 </a:solidFill>
-              </a:rPr>
-              <a:t>A certified decision is a program, its certificate chain, and its certified region; an optimized program has no slack, a margin buys a region, and the region's edges are the triggers.</a:t>
-            </a:r>
-            <a:endParaRPr lang="en-US" sz="1500" dirty="0"/>
-          </a:p>
-        </p:txBody>
-      </p:sp>
-      <p:sp>
-        <p:nvSpPr>
-          <p:cNvPr id="17" name="Number"/>
+                <a:latin typeface="Cambria" pitchFamily="34" charset="0"/>
+                <a:ea typeface="Cambria" pitchFamily="34" charset="-122"/>
+                <a:cs typeface="Cambria" pitchFamily="34" charset="-120"/>
+              </a:rPr>
+              <a:t>Keep a choice open</a:t>
+            </a:r>
+            <a:endParaRPr lang="en-US" sz="1600" dirty="0"/>
+          </a:p>
+        </p:txBody>
+      </p:sp>
+      <p:sp>
+        <p:nvSpPr>
+          <p:cNvPr id="23" name="Flow text"/>
+          <p:cNvSpPr txBox="1"/>
+          <p:nvPr/>
+        </p:nvSpPr>
+        <p:spPr>
+          <a:xfrm>
+            <a:off x="7296729" y="3867912"/>
+            <a:ext cx="2036003" cy="1554480"/>
+          </a:xfrm>
+          <a:prstGeom prst="rect">
+            <a:avLst/>
+          </a:prstGeom>
+          <a:noFill/>
+          <a:ln/>
+        </p:spPr>
+        <p:txBody>
+          <a:bodyPr wrap="square" lIns="0" tIns="0" rIns="0" bIns="0" rtlCol="0" anchor="t"/>
+          <a:lstStyle/>
+          <a:p>
+            <a:pPr algn="ctr" indent="0" marL="0">
+              <a:buNone/>
+            </a:pPr>
+            <a:r>
+              <a:rPr lang="en-US" sz="1400" dirty="0">
+                <a:solidFill>
+                  <a:schemeClr val="tx2"/>
+                </a:solidFill>
+              </a:rPr>
+              <a:t>Put round 3 on a trigger and find the best trigger.</a:t>
+            </a:r>
+            <a:endParaRPr lang="en-US" sz="1400" dirty="0"/>
+          </a:p>
+        </p:txBody>
+      </p:sp>
+      <p:sp>
+        <p:nvSpPr>
+          <p:cNvPr id="24" name="Number"/>
           <p:cNvSpPr/>
           <p:nvPr/>
         </p:nvSpPr>
         <p:spPr>
           <a:xfrm>
-            <a:off x="548640" y="5321808"/>
-            <a:ext cx="566928" cy="566928"/>
+            <a:off x="10259294" y="2606040"/>
+            <a:ext cx="548640" cy="548640"/>
           </a:xfrm>
           <a:prstGeom prst="ellipse">
             <a:avLst/>
@@ -16922,14 +17234,14 @@
       </p:sp>
       <p:sp>
         <p:nvSpPr>
-          <p:cNvPr id="18" name="Text 15"/>
+          <p:cNvPr id="25" name="Text 21"/>
           <p:cNvSpPr txBox="1"/>
           <p:nvPr/>
         </p:nvSpPr>
         <p:spPr>
           <a:xfrm>
-            <a:off x="548640" y="5321808"/>
-            <a:ext cx="566928" cy="566928"/>
+            <a:off x="10259294" y="2606040"/>
+            <a:ext cx="548640" cy="548640"/>
           </a:xfrm>
           <a:prstGeom prst="rect">
             <a:avLst/>
@@ -16945,7 +17257,7 @@
               <a:buNone/>
             </a:pPr>
             <a:r>
-              <a:rPr lang="en-US" sz="1500" b="1" dirty="0">
+              <a:rPr lang="en-US" sz="1600" b="1" dirty="0">
                 <a:solidFill>
                   <a:schemeClr val="bg1"/>
                 </a:solidFill>
@@ -16955,20 +17267,122 @@
               </a:rPr>
               <a:t>5</a:t>
             </a:r>
-            <a:endParaRPr lang="en-US" sz="1500" dirty="0"/>
-          </a:p>
-        </p:txBody>
-      </p:sp>
-      <p:sp>
-        <p:nvSpPr>
-          <p:cNvPr id="19" name="Row text"/>
+            <a:endParaRPr lang="en-US" sz="1600" dirty="0"/>
+          </a:p>
+        </p:txBody>
+      </p:sp>
+      <p:sp>
+        <p:nvSpPr>
+          <p:cNvPr id="26" name="Flow head"/>
           <p:cNvSpPr txBox="1"/>
           <p:nvPr/>
         </p:nvSpPr>
         <p:spPr>
           <a:xfrm>
-            <a:off x="1325880" y="5276088"/>
-            <a:ext cx="10317175" cy="841248"/>
+            <a:off x="9497324" y="3291840"/>
+            <a:ext cx="2072579" cy="548640"/>
+          </a:xfrm>
+          <a:prstGeom prst="rect">
+            <a:avLst/>
+          </a:prstGeom>
+          <a:noFill/>
+          <a:ln/>
+        </p:spPr>
+        <p:txBody>
+          <a:bodyPr wrap="square" lIns="0" tIns="0" rIns="0" bIns="0" rtlCol="0" anchor="t"/>
+          <a:lstStyle/>
+          <a:p>
+            <a:pPr algn="ctr" indent="0" marL="0">
+              <a:buNone/>
+            </a:pPr>
+            <a:r>
+              <a:rPr lang="en-US" sz="1600" b="1" dirty="0">
+                <a:solidFill>
+                  <a:schemeClr val="tx1"/>
+                </a:solidFill>
+                <a:latin typeface="Cambria" pitchFamily="34" charset="0"/>
+                <a:ea typeface="Cambria" pitchFamily="34" charset="-122"/>
+                <a:cs typeface="Cambria" pitchFamily="34" charset="-120"/>
+              </a:rPr>
+              <a:t>Certify</a:t>
+            </a:r>
+            <a:endParaRPr lang="en-US" sz="1600" dirty="0"/>
+          </a:p>
+        </p:txBody>
+      </p:sp>
+      <p:sp>
+        <p:nvSpPr>
+          <p:cNvPr id="27" name="Flow text"/>
+          <p:cNvSpPr txBox="1"/>
+          <p:nvPr/>
+        </p:nvSpPr>
+        <p:spPr>
+          <a:xfrm>
+            <a:off x="9515612" y="3867912"/>
+            <a:ext cx="2036003" cy="1554480"/>
+          </a:xfrm>
+          <a:prstGeom prst="rect">
+            <a:avLst/>
+          </a:prstGeom>
+          <a:noFill/>
+          <a:ln/>
+        </p:spPr>
+        <p:txBody>
+          <a:bodyPr wrap="square" lIns="0" tIns="0" rIns="0" bIns="0" rtlCol="0" anchor="t"/>
+          <a:lstStyle/>
+          <a:p>
+            <a:pPr algn="ctr" indent="0" marL="0">
+              <a:buNone/>
+            </a:pPr>
+            <a:r>
+              <a:rPr lang="en-US" sz="1400" dirty="0">
+                <a:solidFill>
+                  <a:schemeClr val="tx2"/>
+                </a:solidFill>
+              </a:rPr>
+              <a:t>Buy margins of appetite, read the region along the closure rate and the spread, set the triggers.</a:t>
+            </a:r>
+            <a:endParaRPr lang="en-US" sz="1400" dirty="0"/>
+          </a:p>
+        </p:txBody>
+      </p:sp>
+      <p:sp>
+        <p:nvSpPr>
+          <p:cNvPr id="28" name="Deliverable card"/>
+          <p:cNvSpPr/>
+          <p:nvPr/>
+        </p:nvSpPr>
+        <p:spPr>
+          <a:xfrm>
+            <a:off x="548640" y="5486400"/>
+            <a:ext cx="11094415" cy="685800"/>
+          </a:xfrm>
+          <a:prstGeom prst="roundRect">
+            <a:avLst>
+              <a:gd name="adj" fmla="val 10667"/>
+            </a:avLst>
+          </a:prstGeom>
+          <a:solidFill>
+            <a:schemeClr val="bg2"/>
+          </a:solidFill>
+          <a:ln w="9525">
+            <a:solidFill>
+              <a:srgbClr val="C4CBD8"/>
+            </a:solidFill>
+            <a:prstDash val="solid"/>
+          </a:ln>
+        </p:spPr>
+      </p:sp>
+      <p:sp>
+        <p:nvSpPr>
+          <p:cNvPr id="29" name="Deliverable"/>
+          <p:cNvSpPr txBox="1"/>
+          <p:nvPr/>
+        </p:nvSpPr>
+        <p:spPr>
+          <a:xfrm>
+            <a:off x="777240" y="5559552"/>
+            <a:ext cx="10637215" cy="539496"/>
           </a:xfrm>
           <a:prstGeom prst="rect">
             <a:avLst/>
@@ -16984,14 +17398,22 @@
               <a:buNone/>
             </a:pPr>
             <a:r>
-              <a:rPr lang="en-US" sz="1500" dirty="0">
+              <a:rPr lang="en-US" sz="1400" b="1" dirty="0">
                 <a:solidFill>
                   <a:schemeClr val="tx1"/>
                 </a:solidFill>
               </a:rPr>
-              <a:t>Meridian's program—sale first, rounds in years 1–3, payouts held, a $21.37 million package—is worth $1,039.41 million; its pieces as certified would breach the floor on 74 percent of paths.</a:t>
-            </a:r>
-            <a:endParaRPr lang="en-US" sz="1500" dirty="0"/>
+              <a:t>Deliverable:</a:t>
+            </a:r>
+            <a:r>
+              <a:rPr lang="en-US" sz="1400" dirty="0">
+                <a:solidFill>
+                  <a:schemeClr val="tx1"/>
+                </a:solidFill>
+              </a:rPr>
+              <a:t> a one-page note to the board: the program, its roadmap with each milestone's reason, its prices, and its certificate chain with the region and the triggers. About 75 minutes.</a:t>
+            </a:r>
+            <a:endParaRPr lang="en-US" sz="1400" dirty="0"/>
           </a:p>
         </p:txBody>
       </p:sp>
@@ -17097,7 +17519,7 @@
                   <a:schemeClr val="accent1"/>
                 </a:solidFill>
               </a:rPr>
-              <a:t>THIS WEEK'S LABORATORY</a:t>
+              <a:t>KEY TAKEAWAYS</a:t>
             </a:r>
             <a:endParaRPr lang="en-US" sz="1200" dirty="0"/>
           </a:p>
@@ -17138,7 +17560,7 @@
                 <a:ea typeface="Cambria" pitchFamily="34" charset="-122"/>
                 <a:cs typeface="Cambria" pitchFamily="34" charset="-120"/>
               </a:rPr>
-              <a:t>Notebook and workbook reproduce the book</a:t>
+              <a:t>What to carry forward</a:t>
             </a:r>
             <a:endParaRPr lang="en-US" sz="3200" dirty="0"/>
           </a:p>
@@ -17146,26 +17568,24 @@
       </p:sp>
       <p:sp>
         <p:nvSpPr>
-          <p:cNvPr id="5" name="Stat card"/>
+          <p:cNvPr id="5" name="Number"/>
           <p:cNvSpPr/>
           <p:nvPr/>
         </p:nvSpPr>
         <p:spPr>
           <a:xfrm>
-            <a:off x="548640" y="1691640"/>
-            <a:ext cx="2567864" cy="1691640"/>
-          </a:xfrm>
-          <a:prstGeom prst="roundRect">
-            <a:avLst>
-              <a:gd name="adj" fmla="val 4324"/>
-            </a:avLst>
+            <a:off x="548640" y="1737360"/>
+            <a:ext cx="566928" cy="566928"/>
+          </a:xfrm>
+          <a:prstGeom prst="ellipse">
+            <a:avLst/>
           </a:prstGeom>
           <a:solidFill>
-            <a:schemeClr val="tx1"/>
+            <a:schemeClr val="accent1"/>
           </a:solidFill>
-          <a:ln w="9525">
+          <a:ln w="6350">
             <a:solidFill>
-              <a:srgbClr val="0F1E3D"/>
+              <a:schemeClr val="accent1"/>
             </a:solidFill>
             <a:prstDash val="solid"/>
           </a:ln>
@@ -17173,14 +17593,14 @@
       </p:sp>
       <p:sp>
         <p:nvSpPr>
-          <p:cNvPr id="6" name="Stat value"/>
+          <p:cNvPr id="6" name="Text 3"/>
           <p:cNvSpPr txBox="1"/>
           <p:nvPr/>
         </p:nvSpPr>
         <p:spPr>
           <a:xfrm>
-            <a:off x="685800" y="1801368"/>
-            <a:ext cx="2293544" cy="914400"/>
+            <a:off x="548640" y="1737360"/>
+            <a:ext cx="566928" cy="566928"/>
           </a:xfrm>
           <a:prstGeom prst="rect">
             <a:avLst/>
@@ -17196,30 +17616,30 @@
               <a:buNone/>
             </a:pPr>
             <a:r>
-              <a:rPr lang="en-US" sz="4400" b="1" dirty="0">
-                <a:solidFill>
-                  <a:schemeClr val="accent1"/>
-                </a:solidFill>
-                <a:latin typeface="Cambria" pitchFamily="34" charset="0"/>
-                <a:ea typeface="Cambria" pitchFamily="34" charset="-122"/>
-                <a:cs typeface="Cambria" pitchFamily="34" charset="-120"/>
-              </a:rPr>
-              <a:t>203</a:t>
-            </a:r>
-            <a:endParaRPr lang="en-US" sz="4400" dirty="0"/>
-          </a:p>
-        </p:txBody>
-      </p:sp>
-      <p:sp>
-        <p:nvSpPr>
-          <p:cNvPr id="7" name="Stat label"/>
+              <a:rPr lang="en-US" sz="1500" b="1" dirty="0">
+                <a:solidFill>
+                  <a:schemeClr val="bg1"/>
+                </a:solidFill>
+                <a:latin typeface="Calibri" pitchFamily="34" charset="0"/>
+                <a:ea typeface="Calibri" pitchFamily="34" charset="-122"/>
+                <a:cs typeface="Calibri" pitchFamily="34" charset="-120"/>
+              </a:rPr>
+              <a:t>1</a:t>
+            </a:r>
+            <a:endParaRPr lang="en-US" sz="1500" dirty="0"/>
+          </a:p>
+        </p:txBody>
+      </p:sp>
+      <p:sp>
+        <p:nvSpPr>
+          <p:cNvPr id="7" name="Row text"/>
           <p:cNvSpPr txBox="1"/>
           <p:nvPr/>
         </p:nvSpPr>
         <p:spPr>
           <a:xfrm>
-            <a:off x="685800" y="2697480"/>
-            <a:ext cx="2293544" cy="612648"/>
+            <a:off x="1325880" y="1691640"/>
+            <a:ext cx="10317175" cy="841248"/>
           </a:xfrm>
           <a:prstGeom prst="rect">
             <a:avLst/>
@@ -17228,46 +17648,144 @@
           <a:ln/>
         </p:spPr>
         <p:txBody>
-          <a:bodyPr wrap="square" lIns="0" tIns="0" rIns="0" bIns="0" rtlCol="0" anchor="t"/>
+          <a:bodyPr wrap="square" lIns="0" tIns="0" rIns="0" bIns="0" rtlCol="0" anchor="ctr"/>
+          <a:lstStyle/>
+          <a:p>
+            <a:pPr indent="0" marL="0">
+              <a:buNone/>
+            </a:pPr>
+            <a:r>
+              <a:rPr lang="en-US" sz="1500" dirty="0">
+                <a:solidFill>
+                  <a:schemeClr val="tx1"/>
+                </a:solidFill>
+              </a:rPr>
+              <a:t>Pieces that share a stock are one program: certify the sum of their claims, not each piece on the whole room.</a:t>
+            </a:r>
+            <a:endParaRPr lang="en-US" sz="1500" dirty="0"/>
+          </a:p>
+        </p:txBody>
+      </p:sp>
+      <p:sp>
+        <p:nvSpPr>
+          <p:cNvPr id="8" name="Number"/>
+          <p:cNvSpPr/>
+          <p:nvPr/>
+        </p:nvSpPr>
+        <p:spPr>
+          <a:xfrm>
+            <a:off x="548640" y="2633472"/>
+            <a:ext cx="566928" cy="566928"/>
+          </a:xfrm>
+          <a:prstGeom prst="ellipse">
+            <a:avLst/>
+          </a:prstGeom>
+          <a:solidFill>
+            <a:schemeClr val="accent1"/>
+          </a:solidFill>
+          <a:ln w="6350">
+            <a:solidFill>
+              <a:schemeClr val="accent1"/>
+            </a:solidFill>
+            <a:prstDash val="solid"/>
+          </a:ln>
+        </p:spPr>
+      </p:sp>
+      <p:sp>
+        <p:nvSpPr>
+          <p:cNvPr id="9" name="Text 6"/>
+          <p:cNvSpPr txBox="1"/>
+          <p:nvPr/>
+        </p:nvSpPr>
+        <p:spPr>
+          <a:xfrm>
+            <a:off x="548640" y="2633472"/>
+            <a:ext cx="566928" cy="566928"/>
+          </a:xfrm>
+          <a:prstGeom prst="rect">
+            <a:avLst/>
+          </a:prstGeom>
+          <a:noFill/>
+          <a:ln/>
+        </p:spPr>
+        <p:txBody>
+          <a:bodyPr wrap="square" lIns="0" tIns="0" rIns="0" bIns="0" rtlCol="0" anchor="ctr"/>
           <a:lstStyle/>
           <a:p>
             <a:pPr algn="ctr" indent="0" marL="0">
               <a:buNone/>
             </a:pPr>
             <a:r>
-              <a:rPr lang="en-US" sz="1400" dirty="0">
-                <a:solidFill>
-                  <a:schemeClr val="bg2"/>
-                </a:solidFill>
-              </a:rPr>
-              <a:t>notebook checkpoints, every one PASS</a:t>
-            </a:r>
-            <a:endParaRPr lang="en-US" sz="1400" dirty="0"/>
-          </a:p>
-        </p:txBody>
-      </p:sp>
-      <p:sp>
-        <p:nvSpPr>
-          <p:cNvPr id="8" name="Stat card"/>
+              <a:rPr lang="en-US" sz="1500" b="1" dirty="0">
+                <a:solidFill>
+                  <a:schemeClr val="bg1"/>
+                </a:solidFill>
+                <a:latin typeface="Calibri" pitchFamily="34" charset="0"/>
+                <a:ea typeface="Calibri" pitchFamily="34" charset="-122"/>
+                <a:cs typeface="Calibri" pitchFamily="34" charset="-120"/>
+              </a:rPr>
+              <a:t>2</a:t>
+            </a:r>
+            <a:endParaRPr lang="en-US" sz="1500" dirty="0"/>
+          </a:p>
+        </p:txBody>
+      </p:sp>
+      <p:sp>
+        <p:nvSpPr>
+          <p:cNvPr id="10" name="Row text"/>
+          <p:cNvSpPr txBox="1"/>
+          <p:nvPr/>
+        </p:nvSpPr>
+        <p:spPr>
+          <a:xfrm>
+            <a:off x="1325880" y="2587752"/>
+            <a:ext cx="10317175" cy="841248"/>
+          </a:xfrm>
+          <a:prstGeom prst="rect">
+            <a:avLst/>
+          </a:prstGeom>
+          <a:noFill/>
+          <a:ln/>
+        </p:spPr>
+        <p:txBody>
+          <a:bodyPr wrap="square" lIns="0" tIns="0" rIns="0" bIns="0" rtlCol="0" anchor="ctr"/>
+          <a:lstStyle/>
+          <a:p>
+            <a:pPr indent="0" marL="0">
+              <a:buNone/>
+            </a:pPr>
+            <a:r>
+              <a:rPr lang="en-US" sz="1500" dirty="0">
+                <a:solidFill>
+                  <a:schemeClr val="tx1"/>
+                </a:solidFill>
+              </a:rPr>
+              <a:t>Prices on the shared stocks split the program among its owners, and every use of a stock is judged against its price; levers are bought at about the appetite's price and uses that earn less wait.</a:t>
+            </a:r>
+            <a:endParaRPr lang="en-US" sz="1500" dirty="0"/>
+          </a:p>
+        </p:txBody>
+      </p:sp>
+      <p:sp>
+        <p:nvSpPr>
+          <p:cNvPr id="11" name="Number"/>
           <p:cNvSpPr/>
           <p:nvPr/>
         </p:nvSpPr>
         <p:spPr>
           <a:xfrm>
-            <a:off x="3390824" y="1691640"/>
-            <a:ext cx="2567864" cy="1691640"/>
-          </a:xfrm>
-          <a:prstGeom prst="roundRect">
-            <a:avLst>
-              <a:gd name="adj" fmla="val 4324"/>
-            </a:avLst>
+            <a:off x="548640" y="3529584"/>
+            <a:ext cx="566928" cy="566928"/>
+          </a:xfrm>
+          <a:prstGeom prst="ellipse">
+            <a:avLst/>
           </a:prstGeom>
           <a:solidFill>
-            <a:schemeClr val="bg2"/>
+            <a:schemeClr val="accent1"/>
           </a:solidFill>
-          <a:ln w="9525">
+          <a:ln w="6350">
             <a:solidFill>
-              <a:srgbClr val="C4CBD8"/>
+              <a:schemeClr val="accent1"/>
             </a:solidFill>
             <a:prstDash val="solid"/>
           </a:ln>
@@ -17275,14 +17793,14 @@
       </p:sp>
       <p:sp>
         <p:nvSpPr>
-          <p:cNvPr id="9" name="Stat value"/>
+          <p:cNvPr id="12" name="Text 9"/>
           <p:cNvSpPr txBox="1"/>
           <p:nvPr/>
         </p:nvSpPr>
         <p:spPr>
           <a:xfrm>
-            <a:off x="3527984" y="1801368"/>
-            <a:ext cx="2293544" cy="914400"/>
+            <a:off x="548640" y="3529584"/>
+            <a:ext cx="566928" cy="566928"/>
           </a:xfrm>
           <a:prstGeom prst="rect">
             <a:avLst/>
@@ -17298,30 +17816,30 @@
               <a:buNone/>
             </a:pPr>
             <a:r>
-              <a:rPr lang="en-US" sz="4400" b="1" dirty="0">
-                <a:solidFill>
-                  <a:schemeClr val="tx1"/>
-                </a:solidFill>
-                <a:latin typeface="Cambria" pitchFamily="34" charset="0"/>
-                <a:ea typeface="Cambria" pitchFamily="34" charset="-122"/>
-                <a:cs typeface="Cambria" pitchFamily="34" charset="-120"/>
-              </a:rPr>
-              <a:t>120</a:t>
-            </a:r>
-            <a:endParaRPr lang="en-US" sz="4400" dirty="0"/>
-          </a:p>
-        </p:txBody>
-      </p:sp>
-      <p:sp>
-        <p:nvSpPr>
-          <p:cNvPr id="10" name="Stat label"/>
+              <a:rPr lang="en-US" sz="1500" b="1" dirty="0">
+                <a:solidFill>
+                  <a:schemeClr val="bg1"/>
+                </a:solidFill>
+                <a:latin typeface="Calibri" pitchFamily="34" charset="0"/>
+                <a:ea typeface="Calibri" pitchFamily="34" charset="-122"/>
+                <a:cs typeface="Calibri" pitchFamily="34" charset="-120"/>
+              </a:rPr>
+              <a:t>3</a:t>
+            </a:r>
+            <a:endParaRPr lang="en-US" sz="1500" dirty="0"/>
+          </a:p>
+        </p:txBody>
+      </p:sp>
+      <p:sp>
+        <p:nvSpPr>
+          <p:cNvPr id="13" name="Row text"/>
           <p:cNvSpPr txBox="1"/>
           <p:nvPr/>
         </p:nvSpPr>
         <p:spPr>
           <a:xfrm>
-            <a:off x="3527984" y="2697480"/>
-            <a:ext cx="2293544" cy="612648"/>
+            <a:off x="1325880" y="3483864"/>
+            <a:ext cx="10317175" cy="841248"/>
           </a:xfrm>
           <a:prstGeom prst="rect">
             <a:avLst/>
@@ -17330,46 +17848,144 @@
           <a:ln/>
         </p:spPr>
         <p:txBody>
-          <a:bodyPr wrap="square" lIns="0" tIns="0" rIns="0" bIns="0" rtlCol="0" anchor="t"/>
+          <a:bodyPr wrap="square" lIns="0" tIns="0" rIns="0" bIns="0" rtlCol="0" anchor="ctr"/>
+          <a:lstStyle/>
+          <a:p>
+            <a:pPr indent="0" marL="0">
+              <a:buNone/>
+            </a:pPr>
+            <a:r>
+              <a:rPr lang="en-US" sz="1500" dirty="0">
+                <a:solidFill>
+                  <a:schemeClr val="tx1"/>
+                </a:solidFill>
+              </a:rPr>
+              <a:t>Order and timing are computed: what only adds goes first, a feedback core is phased so every phase is stable, and an irreversible move is worth keeping open when its best timing depends on what will be read.</a:t>
+            </a:r>
+            <a:endParaRPr lang="en-US" sz="1500" dirty="0"/>
+          </a:p>
+        </p:txBody>
+      </p:sp>
+      <p:sp>
+        <p:nvSpPr>
+          <p:cNvPr id="14" name="Number"/>
+          <p:cNvSpPr/>
+          <p:nvPr/>
+        </p:nvSpPr>
+        <p:spPr>
+          <a:xfrm>
+            <a:off x="548640" y="4425696"/>
+            <a:ext cx="566928" cy="566928"/>
+          </a:xfrm>
+          <a:prstGeom prst="ellipse">
+            <a:avLst/>
+          </a:prstGeom>
+          <a:solidFill>
+            <a:schemeClr val="accent1"/>
+          </a:solidFill>
+          <a:ln w="6350">
+            <a:solidFill>
+              <a:schemeClr val="accent1"/>
+            </a:solidFill>
+            <a:prstDash val="solid"/>
+          </a:ln>
+        </p:spPr>
+      </p:sp>
+      <p:sp>
+        <p:nvSpPr>
+          <p:cNvPr id="15" name="Text 12"/>
+          <p:cNvSpPr txBox="1"/>
+          <p:nvPr/>
+        </p:nvSpPr>
+        <p:spPr>
+          <a:xfrm>
+            <a:off x="548640" y="4425696"/>
+            <a:ext cx="566928" cy="566928"/>
+          </a:xfrm>
+          <a:prstGeom prst="rect">
+            <a:avLst/>
+          </a:prstGeom>
+          <a:noFill/>
+          <a:ln/>
+        </p:spPr>
+        <p:txBody>
+          <a:bodyPr wrap="square" lIns="0" tIns="0" rIns="0" bIns="0" rtlCol="0" anchor="ctr"/>
           <a:lstStyle/>
           <a:p>
             <a:pPr algn="ctr" indent="0" marL="0">
               <a:buNone/>
             </a:pPr>
             <a:r>
-              <a:rPr lang="en-US" sz="1400" dirty="0">
-                <a:solidFill>
-                  <a:schemeClr val="tx2"/>
-                </a:solidFill>
-              </a:rPr>
-              <a:t>workbook checks against the engine, ALL PASS</a:t>
-            </a:r>
-            <a:endParaRPr lang="en-US" sz="1400" dirty="0"/>
-          </a:p>
-        </p:txBody>
-      </p:sp>
-      <p:sp>
-        <p:nvSpPr>
-          <p:cNvPr id="11" name="Stat card"/>
+              <a:rPr lang="en-US" sz="1500" b="1" dirty="0">
+                <a:solidFill>
+                  <a:schemeClr val="bg1"/>
+                </a:solidFill>
+                <a:latin typeface="Calibri" pitchFamily="34" charset="0"/>
+                <a:ea typeface="Calibri" pitchFamily="34" charset="-122"/>
+                <a:cs typeface="Calibri" pitchFamily="34" charset="-120"/>
+              </a:rPr>
+              <a:t>4</a:t>
+            </a:r>
+            <a:endParaRPr lang="en-US" sz="1500" dirty="0"/>
+          </a:p>
+        </p:txBody>
+      </p:sp>
+      <p:sp>
+        <p:nvSpPr>
+          <p:cNvPr id="16" name="Row text"/>
+          <p:cNvSpPr txBox="1"/>
+          <p:nvPr/>
+        </p:nvSpPr>
+        <p:spPr>
+          <a:xfrm>
+            <a:off x="1325880" y="4379976"/>
+            <a:ext cx="10317175" cy="841248"/>
+          </a:xfrm>
+          <a:prstGeom prst="rect">
+            <a:avLst/>
+          </a:prstGeom>
+          <a:noFill/>
+          <a:ln/>
+        </p:spPr>
+        <p:txBody>
+          <a:bodyPr wrap="square" lIns="0" tIns="0" rIns="0" bIns="0" rtlCol="0" anchor="ctr"/>
+          <a:lstStyle/>
+          <a:p>
+            <a:pPr indent="0" marL="0">
+              <a:buNone/>
+            </a:pPr>
+            <a:r>
+              <a:rPr lang="en-US" sz="1500" dirty="0">
+                <a:solidFill>
+                  <a:schemeClr val="tx1"/>
+                </a:solidFill>
+              </a:rPr>
+              <a:t>A certified decision is a program, its certificate chain, and its certified region; an optimized program has no slack, a margin buys a region, and the region's edges are the triggers.</a:t>
+            </a:r>
+            <a:endParaRPr lang="en-US" sz="1500" dirty="0"/>
+          </a:p>
+        </p:txBody>
+      </p:sp>
+      <p:sp>
+        <p:nvSpPr>
+          <p:cNvPr id="17" name="Number"/>
           <p:cNvSpPr/>
           <p:nvPr/>
         </p:nvSpPr>
         <p:spPr>
           <a:xfrm>
-            <a:off x="6233008" y="1691640"/>
-            <a:ext cx="2567864" cy="1691640"/>
-          </a:xfrm>
-          <a:prstGeom prst="roundRect">
-            <a:avLst>
-              <a:gd name="adj" fmla="val 4324"/>
-            </a:avLst>
+            <a:off x="548640" y="5321808"/>
+            <a:ext cx="566928" cy="566928"/>
+          </a:xfrm>
+          <a:prstGeom prst="ellipse">
+            <a:avLst/>
           </a:prstGeom>
           <a:solidFill>
-            <a:schemeClr val="bg2"/>
+            <a:schemeClr val="accent1"/>
           </a:solidFill>
-          <a:ln w="9525">
+          <a:ln w="6350">
             <a:solidFill>
-              <a:srgbClr val="C4CBD8"/>
+              <a:schemeClr val="accent1"/>
             </a:solidFill>
             <a:prstDash val="solid"/>
           </a:ln>
@@ -17377,14 +17993,14 @@
       </p:sp>
       <p:sp>
         <p:nvSpPr>
-          <p:cNvPr id="12" name="Stat value"/>
+          <p:cNvPr id="18" name="Text 15"/>
           <p:cNvSpPr txBox="1"/>
           <p:nvPr/>
         </p:nvSpPr>
         <p:spPr>
           <a:xfrm>
-            <a:off x="6370168" y="1801368"/>
-            <a:ext cx="2293544" cy="914400"/>
+            <a:off x="548640" y="5321808"/>
+            <a:ext cx="566928" cy="566928"/>
           </a:xfrm>
           <a:prstGeom prst="rect">
             <a:avLst/>
@@ -17400,30 +18016,30 @@
               <a:buNone/>
             </a:pPr>
             <a:r>
-              <a:rPr lang="en-US" sz="4400" b="1" dirty="0">
-                <a:solidFill>
-                  <a:schemeClr val="tx1"/>
-                </a:solidFill>
-                <a:latin typeface="Cambria" pitchFamily="34" charset="0"/>
-                <a:ea typeface="Cambria" pitchFamily="34" charset="-122"/>
-                <a:cs typeface="Cambria" pitchFamily="34" charset="-120"/>
-              </a:rPr>
-              <a:t>26216</a:t>
-            </a:r>
-            <a:endParaRPr lang="en-US" sz="4400" dirty="0"/>
-          </a:p>
-        </p:txBody>
-      </p:sp>
-      <p:sp>
-        <p:nvSpPr>
-          <p:cNvPr id="13" name="Stat label"/>
+              <a:rPr lang="en-US" sz="1500" b="1" dirty="0">
+                <a:solidFill>
+                  <a:schemeClr val="bg1"/>
+                </a:solidFill>
+                <a:latin typeface="Calibri" pitchFamily="34" charset="0"/>
+                <a:ea typeface="Calibri" pitchFamily="34" charset="-122"/>
+                <a:cs typeface="Calibri" pitchFamily="34" charset="-120"/>
+              </a:rPr>
+              <a:t>5</a:t>
+            </a:r>
+            <a:endParaRPr lang="en-US" sz="1500" dirty="0"/>
+          </a:p>
+        </p:txBody>
+      </p:sp>
+      <p:sp>
+        <p:nvSpPr>
+          <p:cNvPr id="19" name="Row text"/>
           <p:cNvSpPr txBox="1"/>
           <p:nvPr/>
         </p:nvSpPr>
         <p:spPr>
           <a:xfrm>
-            <a:off x="6370168" y="2697480"/>
-            <a:ext cx="2293544" cy="612648"/>
+            <a:off x="1325880" y="5276088"/>
+            <a:ext cx="10317175" cy="841248"/>
           </a:xfrm>
           <a:prstGeom prst="rect">
             <a:avLst/>
@@ -17432,197 +18048,21 @@
           <a:ln/>
         </p:spPr>
         <p:txBody>
-          <a:bodyPr wrap="square" lIns="0" tIns="0" rIns="0" bIns="0" rtlCol="0" anchor="t"/>
+          <a:bodyPr wrap="square" lIns="0" tIns="0" rIns="0" bIns="0" rtlCol="0" anchor="ctr"/>
           <a:lstStyle/>
           <a:p>
-            <a:pPr algn="ctr" indent="0" marL="0">
+            <a:pPr indent="0" marL="0">
               <a:buNone/>
             </a:pPr>
             <a:r>
-              <a:rPr lang="en-US" sz="1400" dirty="0">
-                <a:solidFill>
-                  <a:schemeClr val="tx2"/>
-                </a:solidFill>
-              </a:rPr>
-              <a:t>the lab's seed</a:t>
-            </a:r>
-            <a:endParaRPr lang="en-US" sz="1400" dirty="0"/>
-          </a:p>
-        </p:txBody>
-      </p:sp>
-      <p:sp>
-        <p:nvSpPr>
-          <p:cNvPr id="14" name="Stat card"/>
-          <p:cNvSpPr/>
-          <p:nvPr/>
-        </p:nvSpPr>
-        <p:spPr>
-          <a:xfrm>
-            <a:off x="9075191" y="1691640"/>
-            <a:ext cx="2567864" cy="1691640"/>
-          </a:xfrm>
-          <a:prstGeom prst="roundRect">
-            <a:avLst>
-              <a:gd name="adj" fmla="val 4324"/>
-            </a:avLst>
-          </a:prstGeom>
-          <a:solidFill>
-            <a:schemeClr val="bg2"/>
-          </a:solidFill>
-          <a:ln w="9525">
-            <a:solidFill>
-              <a:srgbClr val="C4CBD8"/>
-            </a:solidFill>
-            <a:prstDash val="solid"/>
-          </a:ln>
-        </p:spPr>
-      </p:sp>
-      <p:sp>
-        <p:nvSpPr>
-          <p:cNvPr id="15" name="Stat value"/>
-          <p:cNvSpPr txBox="1"/>
-          <p:nvPr/>
-        </p:nvSpPr>
-        <p:spPr>
-          <a:xfrm>
-            <a:off x="9212351" y="1801368"/>
-            <a:ext cx="2293544" cy="914400"/>
-          </a:xfrm>
-          <a:prstGeom prst="rect">
-            <a:avLst/>
-          </a:prstGeom>
-          <a:noFill/>
-          <a:ln/>
-        </p:spPr>
-        <p:txBody>
-          <a:bodyPr wrap="square" lIns="0" tIns="0" rIns="0" bIns="0" rtlCol="0" anchor="ctr"/>
-          <a:lstStyle/>
-          <a:p>
-            <a:pPr algn="ctr" indent="0" marL="0">
-              <a:buNone/>
-            </a:pPr>
-            <a:r>
-              <a:rPr lang="en-US" sz="3000" b="1" dirty="0">
+              <a:rPr lang="en-US" sz="1500" dirty="0">
                 <a:solidFill>
                   <a:schemeClr val="tx1"/>
                 </a:solidFill>
-                <a:latin typeface="Cambria" pitchFamily="34" charset="0"/>
-                <a:ea typeface="Cambria" pitchFamily="34" charset="-122"/>
-                <a:cs typeface="Cambria" pitchFamily="34" charset="-120"/>
-              </a:rPr>
-              <a:t>AXIOM-16</a:t>
-            </a:r>
-            <a:endParaRPr lang="en-US" sz="3000" dirty="0"/>
-          </a:p>
-        </p:txBody>
-      </p:sp>
-      <p:sp>
-        <p:nvSpPr>
-          <p:cNvPr id="16" name="Stat label"/>
-          <p:cNvSpPr txBox="1"/>
-          <p:nvPr/>
-        </p:nvSpPr>
-        <p:spPr>
-          <a:xfrm>
-            <a:off x="9212351" y="2697480"/>
-            <a:ext cx="2293544" cy="612648"/>
-          </a:xfrm>
-          <a:prstGeom prst="rect">
-            <a:avLst/>
-          </a:prstGeom>
-          <a:noFill/>
-          <a:ln/>
-        </p:spPr>
-        <p:txBody>
-          <a:bodyPr wrap="square" lIns="0" tIns="0" rIns="0" bIns="0" rtlCol="0" anchor="t"/>
-          <a:lstStyle/>
-          <a:p>
-            <a:pPr algn="ctr" indent="0" marL="0">
-              <a:buNone/>
-            </a:pPr>
-            <a:r>
-              <a:rPr lang="en-US" sz="1400" dirty="0">
-                <a:solidFill>
-                  <a:schemeClr val="tx2"/>
-                </a:solidFill>
-              </a:rPr>
-              <a:t>AXIOM Lab 2.16</a:t>
-            </a:r>
-            <a:endParaRPr lang="en-US" sz="1400" dirty="0"/>
-          </a:p>
-        </p:txBody>
-      </p:sp>
-      <p:sp>
-        <p:nvSpPr>
-          <p:cNvPr id="17" name="Bullets"/>
-          <p:cNvSpPr txBox="1"/>
-          <p:nvPr/>
-        </p:nvSpPr>
-        <p:spPr>
-          <a:xfrm>
-            <a:off x="548640" y="3703320"/>
-            <a:ext cx="11094415" cy="2468880"/>
-          </a:xfrm>
-          <a:prstGeom prst="rect">
-            <a:avLst/>
-          </a:prstGeom>
-          <a:noFill/>
-          <a:ln/>
-        </p:spPr>
-        <p:txBody>
-          <a:bodyPr wrap="square" lIns="635" tIns="635" rIns="635" bIns="635" rtlCol="0" anchor="t"/>
-          <a:lstStyle/>
-          <a:p>
-            <a:pPr marL="228600" indent="-228600">
-              <a:spcAft>
-                <a:spcPts val="800"/>
-              </a:spcAft>
-              <a:buSzPct val="100000"/>
-              <a:buChar char="•"/>
-            </a:pPr>
-            <a:r>
-              <a:rPr lang="en-US" sz="1700" b="1" dirty="0">
-                <a:solidFill>
-                  <a:schemeClr val="tx1"/>
-                </a:solidFill>
-              </a:rPr>
-              <a:t>Notebook</a:t>
-            </a:r>
-            <a:r>
-              <a:rPr lang="en-US" sz="1700" dirty="0">
-                <a:solidFill>
-                  <a:schemeClr val="tx1"/>
-                </a:solidFill>
-              </a:rPr>
-              <a:t> DCT_V2_Ch16_Lab.ipynb: Worked Example 16.1 and the lab's five steps in seven panels, with the book's seeds, ready for Colab</a:t>
-            </a:r>
-            <a:endParaRPr lang="en-US" sz="1700" dirty="0"/>
-          </a:p>
-          <a:p>
-            <a:pPr marL="228600" indent="-228600">
-              <a:spcAft>
-                <a:spcPts val="800"/>
-              </a:spcAft>
-              <a:buSzPct val="100000"/>
-              <a:buChar char="•"/>
-            </a:pPr>
-            <a:r>
-              <a:rPr lang="en-US" sz="1700" b="1" dirty="0">
-                <a:solidFill>
-                  <a:schemeClr val="tx1"/>
-                </a:solidFill>
-              </a:rPr>
-              <a:t>Workbook</a:t>
-            </a:r>
-            <a:r>
-              <a:rPr lang="en-US" sz="1700" dirty="0">
-                <a:solidFill>
-                  <a:schemeClr val="tx1"/>
-                </a:solidFill>
-              </a:rPr>
-              <a:t> DCT_V2_Ch16_Lab.xlsx: Chapter 5's war chest, the one account and its joint check, every program's value, the prices, the trigger and the core, in formulas</a:t>
-            </a:r>
-            <a:endParaRPr lang="en-US" sz="1700" dirty="0"/>
+              </a:rPr>
+              <a:t>Meridian's program—sale first, rounds in years 1–3, payouts held, a $21.37 million package—is worth $1,039.41 million; its pieces as certified would breach the floor on 74 percent of paths.</a:t>
+            </a:r>
+            <a:endParaRPr lang="en-US" sz="1500" dirty="0"/>
           </a:p>
         </p:txBody>
       </p:sp>
@@ -17728,6 +18168,637 @@
                   <a:schemeClr val="accent1"/>
                 </a:solidFill>
               </a:rPr>
+              <a:t>THIS WEEK'S LABORATORY</a:t>
+            </a:r>
+            <a:endParaRPr lang="en-US" sz="1200" dirty="0"/>
+          </a:p>
+        </p:txBody>
+      </p:sp>
+      <p:sp>
+        <p:nvSpPr>
+          <p:cNvPr id="4" name="Text 1"/>
+          <p:cNvSpPr/>
+          <p:nvPr>
+            <p:ph idx="103" type="title" hasCustomPrompt="1"/>
+          </p:nvPr>
+        </p:nvSpPr>
+        <p:spPr>
+          <a:xfrm>
+            <a:off x="548640" y="658368"/>
+            <a:ext cx="11094415" cy="868680"/>
+          </a:xfrm>
+          <a:prstGeom prst="rect">
+            <a:avLst/>
+          </a:prstGeom>
+          <a:noFill/>
+          <a:ln/>
+        </p:spPr>
+        <p:txBody>
+          <a:bodyPr wrap="square" lIns="0" tIns="0" rIns="0" bIns="0" rtlCol="0" anchor="t"/>
+          <a:lstStyle/>
+          <a:p>
+            <a:pPr algn="l" indent="0" marL="0">
+              <a:buNone/>
+            </a:pPr>
+            <a:r>
+              <a:rPr lang="en-US" sz="3200" b="1" dirty="0">
+                <a:solidFill>
+                  <a:schemeClr val="tx1"/>
+                </a:solidFill>
+                <a:latin typeface="Cambria" pitchFamily="34" charset="0"/>
+                <a:ea typeface="Cambria" pitchFamily="34" charset="-122"/>
+                <a:cs typeface="Cambria" pitchFamily="34" charset="-120"/>
+              </a:rPr>
+              <a:t>Notebook and workbook reproduce the book</a:t>
+            </a:r>
+            <a:endParaRPr lang="en-US" sz="3200" dirty="0"/>
+          </a:p>
+        </p:txBody>
+      </p:sp>
+      <p:sp>
+        <p:nvSpPr>
+          <p:cNvPr id="5" name="Stat card"/>
+          <p:cNvSpPr/>
+          <p:nvPr/>
+        </p:nvSpPr>
+        <p:spPr>
+          <a:xfrm>
+            <a:off x="548640" y="1691640"/>
+            <a:ext cx="2567864" cy="1691640"/>
+          </a:xfrm>
+          <a:prstGeom prst="roundRect">
+            <a:avLst>
+              <a:gd name="adj" fmla="val 4324"/>
+            </a:avLst>
+          </a:prstGeom>
+          <a:solidFill>
+            <a:schemeClr val="tx1"/>
+          </a:solidFill>
+          <a:ln w="9525">
+            <a:solidFill>
+              <a:srgbClr val="0F1E3D"/>
+            </a:solidFill>
+            <a:prstDash val="solid"/>
+          </a:ln>
+        </p:spPr>
+      </p:sp>
+      <p:sp>
+        <p:nvSpPr>
+          <p:cNvPr id="6" name="Stat value"/>
+          <p:cNvSpPr txBox="1"/>
+          <p:nvPr/>
+        </p:nvSpPr>
+        <p:spPr>
+          <a:xfrm>
+            <a:off x="685800" y="1801368"/>
+            <a:ext cx="2293544" cy="914400"/>
+          </a:xfrm>
+          <a:prstGeom prst="rect">
+            <a:avLst/>
+          </a:prstGeom>
+          <a:noFill/>
+          <a:ln/>
+        </p:spPr>
+        <p:txBody>
+          <a:bodyPr wrap="square" lIns="0" tIns="0" rIns="0" bIns="0" rtlCol="0" anchor="ctr"/>
+          <a:lstStyle/>
+          <a:p>
+            <a:pPr algn="ctr" indent="0" marL="0">
+              <a:buNone/>
+            </a:pPr>
+            <a:r>
+              <a:rPr lang="en-US" sz="4400" b="1" dirty="0">
+                <a:solidFill>
+                  <a:schemeClr val="accent1"/>
+                </a:solidFill>
+                <a:latin typeface="Cambria" pitchFamily="34" charset="0"/>
+                <a:ea typeface="Cambria" pitchFamily="34" charset="-122"/>
+                <a:cs typeface="Cambria" pitchFamily="34" charset="-120"/>
+              </a:rPr>
+              <a:t>203</a:t>
+            </a:r>
+            <a:endParaRPr lang="en-US" sz="4400" dirty="0"/>
+          </a:p>
+        </p:txBody>
+      </p:sp>
+      <p:sp>
+        <p:nvSpPr>
+          <p:cNvPr id="7" name="Stat label"/>
+          <p:cNvSpPr txBox="1"/>
+          <p:nvPr/>
+        </p:nvSpPr>
+        <p:spPr>
+          <a:xfrm>
+            <a:off x="685800" y="2697480"/>
+            <a:ext cx="2293544" cy="612648"/>
+          </a:xfrm>
+          <a:prstGeom prst="rect">
+            <a:avLst/>
+          </a:prstGeom>
+          <a:noFill/>
+          <a:ln/>
+        </p:spPr>
+        <p:txBody>
+          <a:bodyPr wrap="square" lIns="0" tIns="0" rIns="0" bIns="0" rtlCol="0" anchor="t"/>
+          <a:lstStyle/>
+          <a:p>
+            <a:pPr algn="ctr" indent="0" marL="0">
+              <a:buNone/>
+            </a:pPr>
+            <a:r>
+              <a:rPr lang="en-US" sz="1400" dirty="0">
+                <a:solidFill>
+                  <a:schemeClr val="bg2"/>
+                </a:solidFill>
+              </a:rPr>
+              <a:t>notebook checkpoints, every one PASS</a:t>
+            </a:r>
+            <a:endParaRPr lang="en-US" sz="1400" dirty="0"/>
+          </a:p>
+        </p:txBody>
+      </p:sp>
+      <p:sp>
+        <p:nvSpPr>
+          <p:cNvPr id="8" name="Stat card"/>
+          <p:cNvSpPr/>
+          <p:nvPr/>
+        </p:nvSpPr>
+        <p:spPr>
+          <a:xfrm>
+            <a:off x="3390824" y="1691640"/>
+            <a:ext cx="2567864" cy="1691640"/>
+          </a:xfrm>
+          <a:prstGeom prst="roundRect">
+            <a:avLst>
+              <a:gd name="adj" fmla="val 4324"/>
+            </a:avLst>
+          </a:prstGeom>
+          <a:solidFill>
+            <a:schemeClr val="bg2"/>
+          </a:solidFill>
+          <a:ln w="9525">
+            <a:solidFill>
+              <a:srgbClr val="C4CBD8"/>
+            </a:solidFill>
+            <a:prstDash val="solid"/>
+          </a:ln>
+        </p:spPr>
+      </p:sp>
+      <p:sp>
+        <p:nvSpPr>
+          <p:cNvPr id="9" name="Stat value"/>
+          <p:cNvSpPr txBox="1"/>
+          <p:nvPr/>
+        </p:nvSpPr>
+        <p:spPr>
+          <a:xfrm>
+            <a:off x="3527984" y="1801368"/>
+            <a:ext cx="2293544" cy="914400"/>
+          </a:xfrm>
+          <a:prstGeom prst="rect">
+            <a:avLst/>
+          </a:prstGeom>
+          <a:noFill/>
+          <a:ln/>
+        </p:spPr>
+        <p:txBody>
+          <a:bodyPr wrap="square" lIns="0" tIns="0" rIns="0" bIns="0" rtlCol="0" anchor="ctr"/>
+          <a:lstStyle/>
+          <a:p>
+            <a:pPr algn="ctr" indent="0" marL="0">
+              <a:buNone/>
+            </a:pPr>
+            <a:r>
+              <a:rPr lang="en-US" sz="4400" b="1" dirty="0">
+                <a:solidFill>
+                  <a:schemeClr val="tx1"/>
+                </a:solidFill>
+                <a:latin typeface="Cambria" pitchFamily="34" charset="0"/>
+                <a:ea typeface="Cambria" pitchFamily="34" charset="-122"/>
+                <a:cs typeface="Cambria" pitchFamily="34" charset="-120"/>
+              </a:rPr>
+              <a:t>120</a:t>
+            </a:r>
+            <a:endParaRPr lang="en-US" sz="4400" dirty="0"/>
+          </a:p>
+        </p:txBody>
+      </p:sp>
+      <p:sp>
+        <p:nvSpPr>
+          <p:cNvPr id="10" name="Stat label"/>
+          <p:cNvSpPr txBox="1"/>
+          <p:nvPr/>
+        </p:nvSpPr>
+        <p:spPr>
+          <a:xfrm>
+            <a:off x="3527984" y="2697480"/>
+            <a:ext cx="2293544" cy="612648"/>
+          </a:xfrm>
+          <a:prstGeom prst="rect">
+            <a:avLst/>
+          </a:prstGeom>
+          <a:noFill/>
+          <a:ln/>
+        </p:spPr>
+        <p:txBody>
+          <a:bodyPr wrap="square" lIns="0" tIns="0" rIns="0" bIns="0" rtlCol="0" anchor="t"/>
+          <a:lstStyle/>
+          <a:p>
+            <a:pPr algn="ctr" indent="0" marL="0">
+              <a:buNone/>
+            </a:pPr>
+            <a:r>
+              <a:rPr lang="en-US" sz="1400" dirty="0">
+                <a:solidFill>
+                  <a:schemeClr val="tx2"/>
+                </a:solidFill>
+              </a:rPr>
+              <a:t>workbook checks against the engine, ALL PASS</a:t>
+            </a:r>
+            <a:endParaRPr lang="en-US" sz="1400" dirty="0"/>
+          </a:p>
+        </p:txBody>
+      </p:sp>
+      <p:sp>
+        <p:nvSpPr>
+          <p:cNvPr id="11" name="Stat card"/>
+          <p:cNvSpPr/>
+          <p:nvPr/>
+        </p:nvSpPr>
+        <p:spPr>
+          <a:xfrm>
+            <a:off x="6233008" y="1691640"/>
+            <a:ext cx="2567864" cy="1691640"/>
+          </a:xfrm>
+          <a:prstGeom prst="roundRect">
+            <a:avLst>
+              <a:gd name="adj" fmla="val 4324"/>
+            </a:avLst>
+          </a:prstGeom>
+          <a:solidFill>
+            <a:schemeClr val="bg2"/>
+          </a:solidFill>
+          <a:ln w="9525">
+            <a:solidFill>
+              <a:srgbClr val="C4CBD8"/>
+            </a:solidFill>
+            <a:prstDash val="solid"/>
+          </a:ln>
+        </p:spPr>
+      </p:sp>
+      <p:sp>
+        <p:nvSpPr>
+          <p:cNvPr id="12" name="Stat value"/>
+          <p:cNvSpPr txBox="1"/>
+          <p:nvPr/>
+        </p:nvSpPr>
+        <p:spPr>
+          <a:xfrm>
+            <a:off x="6370168" y="1801368"/>
+            <a:ext cx="2293544" cy="914400"/>
+          </a:xfrm>
+          <a:prstGeom prst="rect">
+            <a:avLst/>
+          </a:prstGeom>
+          <a:noFill/>
+          <a:ln/>
+        </p:spPr>
+        <p:txBody>
+          <a:bodyPr wrap="square" lIns="0" tIns="0" rIns="0" bIns="0" rtlCol="0" anchor="ctr"/>
+          <a:lstStyle/>
+          <a:p>
+            <a:pPr algn="ctr" indent="0" marL="0">
+              <a:buNone/>
+            </a:pPr>
+            <a:r>
+              <a:rPr lang="en-US" sz="4400" b="1" dirty="0">
+                <a:solidFill>
+                  <a:schemeClr val="tx1"/>
+                </a:solidFill>
+                <a:latin typeface="Cambria" pitchFamily="34" charset="0"/>
+                <a:ea typeface="Cambria" pitchFamily="34" charset="-122"/>
+                <a:cs typeface="Cambria" pitchFamily="34" charset="-120"/>
+              </a:rPr>
+              <a:t>26216</a:t>
+            </a:r>
+            <a:endParaRPr lang="en-US" sz="4400" dirty="0"/>
+          </a:p>
+        </p:txBody>
+      </p:sp>
+      <p:sp>
+        <p:nvSpPr>
+          <p:cNvPr id="13" name="Stat label"/>
+          <p:cNvSpPr txBox="1"/>
+          <p:nvPr/>
+        </p:nvSpPr>
+        <p:spPr>
+          <a:xfrm>
+            <a:off x="6370168" y="2697480"/>
+            <a:ext cx="2293544" cy="612648"/>
+          </a:xfrm>
+          <a:prstGeom prst="rect">
+            <a:avLst/>
+          </a:prstGeom>
+          <a:noFill/>
+          <a:ln/>
+        </p:spPr>
+        <p:txBody>
+          <a:bodyPr wrap="square" lIns="0" tIns="0" rIns="0" bIns="0" rtlCol="0" anchor="t"/>
+          <a:lstStyle/>
+          <a:p>
+            <a:pPr algn="ctr" indent="0" marL="0">
+              <a:buNone/>
+            </a:pPr>
+            <a:r>
+              <a:rPr lang="en-US" sz="1400" dirty="0">
+                <a:solidFill>
+                  <a:schemeClr val="tx2"/>
+                </a:solidFill>
+              </a:rPr>
+              <a:t>the lab's seed</a:t>
+            </a:r>
+            <a:endParaRPr lang="en-US" sz="1400" dirty="0"/>
+          </a:p>
+        </p:txBody>
+      </p:sp>
+      <p:sp>
+        <p:nvSpPr>
+          <p:cNvPr id="14" name="Stat card"/>
+          <p:cNvSpPr/>
+          <p:nvPr/>
+        </p:nvSpPr>
+        <p:spPr>
+          <a:xfrm>
+            <a:off x="9075191" y="1691640"/>
+            <a:ext cx="2567864" cy="1691640"/>
+          </a:xfrm>
+          <a:prstGeom prst="roundRect">
+            <a:avLst>
+              <a:gd name="adj" fmla="val 4324"/>
+            </a:avLst>
+          </a:prstGeom>
+          <a:solidFill>
+            <a:schemeClr val="bg2"/>
+          </a:solidFill>
+          <a:ln w="9525">
+            <a:solidFill>
+              <a:srgbClr val="C4CBD8"/>
+            </a:solidFill>
+            <a:prstDash val="solid"/>
+          </a:ln>
+        </p:spPr>
+      </p:sp>
+      <p:sp>
+        <p:nvSpPr>
+          <p:cNvPr id="15" name="Stat value"/>
+          <p:cNvSpPr txBox="1"/>
+          <p:nvPr/>
+        </p:nvSpPr>
+        <p:spPr>
+          <a:xfrm>
+            <a:off x="9212351" y="1801368"/>
+            <a:ext cx="2293544" cy="914400"/>
+          </a:xfrm>
+          <a:prstGeom prst="rect">
+            <a:avLst/>
+          </a:prstGeom>
+          <a:noFill/>
+          <a:ln/>
+        </p:spPr>
+        <p:txBody>
+          <a:bodyPr wrap="square" lIns="0" tIns="0" rIns="0" bIns="0" rtlCol="0" anchor="ctr"/>
+          <a:lstStyle/>
+          <a:p>
+            <a:pPr algn="ctr" indent="0" marL="0">
+              <a:buNone/>
+            </a:pPr>
+            <a:r>
+              <a:rPr lang="en-US" sz="3000" b="1" dirty="0">
+                <a:solidFill>
+                  <a:schemeClr val="tx1"/>
+                </a:solidFill>
+                <a:latin typeface="Cambria" pitchFamily="34" charset="0"/>
+                <a:ea typeface="Cambria" pitchFamily="34" charset="-122"/>
+                <a:cs typeface="Cambria" pitchFamily="34" charset="-120"/>
+              </a:rPr>
+              <a:t>AXIOM-16</a:t>
+            </a:r>
+            <a:endParaRPr lang="en-US" sz="3000" dirty="0"/>
+          </a:p>
+        </p:txBody>
+      </p:sp>
+      <p:sp>
+        <p:nvSpPr>
+          <p:cNvPr id="16" name="Stat label"/>
+          <p:cNvSpPr txBox="1"/>
+          <p:nvPr/>
+        </p:nvSpPr>
+        <p:spPr>
+          <a:xfrm>
+            <a:off x="9212351" y="2697480"/>
+            <a:ext cx="2293544" cy="612648"/>
+          </a:xfrm>
+          <a:prstGeom prst="rect">
+            <a:avLst/>
+          </a:prstGeom>
+          <a:noFill/>
+          <a:ln/>
+        </p:spPr>
+        <p:txBody>
+          <a:bodyPr wrap="square" lIns="0" tIns="0" rIns="0" bIns="0" rtlCol="0" anchor="t"/>
+          <a:lstStyle/>
+          <a:p>
+            <a:pPr algn="ctr" indent="0" marL="0">
+              <a:buNone/>
+            </a:pPr>
+            <a:r>
+              <a:rPr lang="en-US" sz="1400" dirty="0">
+                <a:solidFill>
+                  <a:schemeClr val="tx2"/>
+                </a:solidFill>
+              </a:rPr>
+              <a:t>AXIOM Lab 2.16</a:t>
+            </a:r>
+            <a:endParaRPr lang="en-US" sz="1400" dirty="0"/>
+          </a:p>
+        </p:txBody>
+      </p:sp>
+      <p:sp>
+        <p:nvSpPr>
+          <p:cNvPr id="17" name="Bullets"/>
+          <p:cNvSpPr txBox="1"/>
+          <p:nvPr/>
+        </p:nvSpPr>
+        <p:spPr>
+          <a:xfrm>
+            <a:off x="548640" y="3703320"/>
+            <a:ext cx="11094415" cy="2468880"/>
+          </a:xfrm>
+          <a:prstGeom prst="rect">
+            <a:avLst/>
+          </a:prstGeom>
+          <a:noFill/>
+          <a:ln/>
+        </p:spPr>
+        <p:txBody>
+          <a:bodyPr wrap="square" lIns="635" tIns="635" rIns="635" bIns="635" rtlCol="0" anchor="t"/>
+          <a:lstStyle/>
+          <a:p>
+            <a:pPr marL="228600" indent="-228600">
+              <a:spcAft>
+                <a:spcPts val="800"/>
+              </a:spcAft>
+              <a:buSzPct val="100000"/>
+              <a:buChar char="•"/>
+            </a:pPr>
+            <a:r>
+              <a:rPr lang="en-US" sz="1700" b="1" dirty="0">
+                <a:solidFill>
+                  <a:schemeClr val="tx1"/>
+                </a:solidFill>
+              </a:rPr>
+              <a:t>Notebook</a:t>
+            </a:r>
+            <a:r>
+              <a:rPr lang="en-US" sz="1700" dirty="0">
+                <a:solidFill>
+                  <a:schemeClr val="tx1"/>
+                </a:solidFill>
+              </a:rPr>
+              <a:t> DCT_V2_Ch16_Lab.ipynb: Worked Example 16.1 and the lab's five steps in seven panels, with the book's seeds, ready for Colab</a:t>
+            </a:r>
+            <a:endParaRPr lang="en-US" sz="1700" dirty="0"/>
+          </a:p>
+          <a:p>
+            <a:pPr marL="228600" indent="-228600">
+              <a:spcAft>
+                <a:spcPts val="800"/>
+              </a:spcAft>
+              <a:buSzPct val="100000"/>
+              <a:buChar char="•"/>
+            </a:pPr>
+            <a:r>
+              <a:rPr lang="en-US" sz="1700" b="1" dirty="0">
+                <a:solidFill>
+                  <a:schemeClr val="tx1"/>
+                </a:solidFill>
+              </a:rPr>
+              <a:t>Workbook</a:t>
+            </a:r>
+            <a:r>
+              <a:rPr lang="en-US" sz="1700" dirty="0">
+                <a:solidFill>
+                  <a:schemeClr val="tx1"/>
+                </a:solidFill>
+              </a:rPr>
+              <a:t> DCT_V2_Ch16_Lab.xlsx: Chapter 5's war chest, the one account and its joint check, every program's value, the prices, the trigger and the core, in formulas</a:t>
+            </a:r>
+            <a:endParaRPr lang="en-US" sz="1700" dirty="0"/>
+          </a:p>
+        </p:txBody>
+      </p:sp>
+      <p:sp>
+        <p:nvSpPr>
+          <p:cNvPr id="25" name="Slide Number Placeholder 0"/>
+          <p:cNvSpPr>
+            <a:spLocks noGrp="1"/>
+          </p:cNvSpPr>
+          <p:nvPr>
+            <p:ph type="sldNum" sz="quarter" idx="4294967295"/>
+          </p:nvPr>
+        </p:nvSpPr>
+        <p:spPr>
+          <a:xfrm>
+            <a:off x="11094415" y="6382512"/>
+            <a:ext cx="548640" cy="237744"/>
+          </a:xfrm>
+          <a:prstGeom prst="rect">
+            <a:avLst/>
+          </a:prstGeom>
+          <a:extLst>
+            <a:ext uri="{C572A759-6A51-4108-AA02-DFA0A04FC94B}">
+              <ma14:wrappingTextBoxFlag xmlns:ma14="http://schemas.microsoft.com/office/mac/drawingml/2011/main" val="0"/>
+            </a:ext>
+          </a:extLst>
+        </p:spPr>
+        <p:txBody>
+          <a:bodyPr/>
+          <a:lstStyle>
+            <a:lvl1pPr>
+              <a:defRPr sz="1000">
+                <a:solidFill>
+                  <a:srgbClr val="5A6B82"/>
+                </a:solidFill>
+              </a:defRPr>
+            </a:lvl1pPr>
+          </a:lstStyle>
+          <a:p>
+            <a:pPr algn="r"/>
+            <a:fld id="{F7021451-1387-4CA6-816F-3879F97B5CBC}" type="slidenum">
+              <a:rPr b="0" lang="en-US"/>
+              <a:t>22</a:t>
+            </a:fld>
+            <a:endParaRPr lang="en-US"/>
+          </a:p>
+        </p:txBody>
+      </p:sp>
+    </p:spTree>
+  </p:cSld>
+  <p:clrMapOvr>
+    <a:masterClrMapping/>
+  </p:clrMapOvr>
+</p:sld>
+</file>
+
+<file path=ppt/slides/slide23.xml><?xml version="1.0" encoding="utf-8"?>
+<p:sld xmlns:a="http://schemas.openxmlformats.org/drawingml/2006/main" xmlns:r="http://schemas.openxmlformats.org/officeDocument/2006/relationships" xmlns:p="http://schemas.openxmlformats.org/presentationml/2006/main">
+  <p:cSld name="Slide 23">
+    <p:spTree>
+      <p:nvGrpSpPr>
+        <p:cNvPr id="1" name=""/>
+        <p:cNvGrpSpPr/>
+        <p:nvPr/>
+      </p:nvGrpSpPr>
+      <p:grpSpPr>
+        <a:xfrm>
+          <a:off x="0" y="0"/>
+          <a:ext cx="0" cy="0"/>
+          <a:chOff x="0" y="0"/>
+          <a:chExt cx="0" cy="0"/>
+        </a:xfrm>
+      </p:grpSpPr>
+      <p:sp>
+        <p:nvSpPr>
+          <p:cNvPr id="3" name="Text 1"/>
+          <p:cNvSpPr/>
+          <p:nvPr>
+            <p:ph idx="102" type="body" hasCustomPrompt="1"/>
+          </p:nvPr>
+        </p:nvSpPr>
+        <p:spPr>
+          <a:xfrm>
+            <a:off x="548640" y="347472"/>
+            <a:ext cx="11094415" cy="292608"/>
+          </a:xfrm>
+          <a:prstGeom prst="rect">
+            <a:avLst/>
+          </a:prstGeom>
+          <a:noFill/>
+          <a:ln/>
+        </p:spPr>
+        <p:txBody>
+          <a:bodyPr wrap="square" lIns="0" tIns="0" rIns="0" bIns="0" rtlCol="0"/>
+          <a:lstStyle/>
+          <a:p>
+            <a:pPr indent="0" marL="0">
+              <a:buNone/>
+            </a:pPr>
+            <a:r>
+              <a:rPr lang="en-US" sz="1200" b="1" spc="200" kern="0" dirty="0">
+                <a:solidFill>
+                  <a:schemeClr val="accent1"/>
+                </a:solidFill>
+              </a:rPr>
               <a:t>CLOSE · THE SERIES</a:t>
             </a:r>
             <a:endParaRPr lang="en-US" sz="1200" dirty="0"/>
@@ -17932,7 +19003,7 @@
             <a:pPr algn="r"/>
             <a:fld id="{F7021451-1387-4CA6-816F-3879F97B5CBC}" type="slidenum">
               <a:rPr b="0" lang="en-US"/>
-              <a:t>22</a:t>
+              <a:t>23</a:t>
             </a:fld>
             <a:endParaRPr lang="en-US"/>
           </a:p>
@@ -18685,7 +19756,7 @@
                 <a:ea typeface="Cambria" pitchFamily="34" charset="-122"/>
                 <a:cs typeface="Cambria" pitchFamily="34" charset="-120"/>
               </a:rPr>
-              <a:t>Five sections, a worked example and a lab</a:t>
+              <a:t>Five sections, a worked example, a case and a lab</a:t>
             </a:r>
             <a:endParaRPr lang="en-US" sz="3200" dirty="0"/>
           </a:p>
@@ -19576,7 +20647,7 @@
                   <a:schemeClr val="accent1"/>
                 </a:solidFill>
               </a:rPr>
-              <a:t>AXIOM Lab 2.16</a:t>
+              <a:t>In Practice</a:t>
             </a:r>
             <a:endParaRPr lang="en-US" sz="1300" dirty="0"/>
           </a:p>
@@ -19615,7 +20686,7 @@
                 <a:ea typeface="Cambria" pitchFamily="34" charset="-122"/>
                 <a:cs typeface="Cambria" pitchFamily="34" charset="-120"/>
               </a:rPr>
-              <a:t>One Program: Check, Order, Price, Certify</a:t>
+              <a:t>Banks Put a Price on Their Liquidity</a:t>
             </a:r>
             <a:endParaRPr lang="en-US" sz="1500" dirty="0"/>
           </a:p>
@@ -19630,6 +20701,144 @@
         <p:spPr>
           <a:xfrm>
             <a:off x="6415888" y="5660136"/>
+            <a:ext cx="2202104" cy="384048"/>
+          </a:xfrm>
+          <a:prstGeom prst="rect">
+            <a:avLst/>
+          </a:prstGeom>
+          <a:noFill/>
+          <a:ln/>
+        </p:spPr>
+        <p:txBody>
+          <a:bodyPr wrap="square" lIns="0" tIns="0" rIns="0" bIns="0" rtlCol="0" anchor="t"/>
+          <a:lstStyle/>
+          <a:p>
+            <a:pPr indent="0" marL="0">
+              <a:buNone/>
+            </a:pPr>
+            <a:r>
+              <a:rPr lang="en-US" sz="1300" dirty="0">
+                <a:solidFill>
+                  <a:schemeClr val="tx2"/>
+                </a:solidFill>
+              </a:rPr>
+              <a:t>At a Glance · board questions</a:t>
+            </a:r>
+            <a:endParaRPr lang="en-US" sz="1300" dirty="0"/>
+          </a:p>
+        </p:txBody>
+      </p:sp>
+      <p:sp>
+        <p:nvSpPr>
+          <p:cNvPr id="33" name="Card"/>
+          <p:cNvSpPr/>
+          <p:nvPr/>
+        </p:nvSpPr>
+        <p:spPr>
+          <a:xfrm>
+            <a:off x="9075191" y="4069080"/>
+            <a:ext cx="2567864" cy="2103120"/>
+          </a:xfrm>
+          <a:prstGeom prst="roundRect">
+            <a:avLst>
+              <a:gd name="adj" fmla="val 3478"/>
+            </a:avLst>
+          </a:prstGeom>
+          <a:solidFill>
+            <a:schemeClr val="bg2"/>
+          </a:solidFill>
+          <a:ln w="9525">
+            <a:solidFill>
+              <a:srgbClr val="C4CBD8"/>
+            </a:solidFill>
+            <a:prstDash val="solid"/>
+          </a:ln>
+        </p:spPr>
+      </p:sp>
+      <p:sp>
+        <p:nvSpPr>
+          <p:cNvPr id="34" name="Card label"/>
+          <p:cNvSpPr txBox="1"/>
+          <p:nvPr/>
+        </p:nvSpPr>
+        <p:spPr>
+          <a:xfrm>
+            <a:off x="9258071" y="4197096"/>
+            <a:ext cx="2202104" cy="310896"/>
+          </a:xfrm>
+          <a:prstGeom prst="rect">
+            <a:avLst/>
+          </a:prstGeom>
+          <a:noFill/>
+          <a:ln/>
+        </p:spPr>
+        <p:txBody>
+          <a:bodyPr wrap="square" lIns="0" tIns="0" rIns="0" bIns="0" rtlCol="0" anchor="ctr"/>
+          <a:lstStyle/>
+          <a:p>
+            <a:pPr indent="0" marL="0">
+              <a:buNone/>
+            </a:pPr>
+            <a:r>
+              <a:rPr lang="en-US" sz="1300" b="1" dirty="0">
+                <a:solidFill>
+                  <a:schemeClr val="accent1"/>
+                </a:solidFill>
+              </a:rPr>
+              <a:t>AXIOM Lab 2.16</a:t>
+            </a:r>
+            <a:endParaRPr lang="en-US" sz="1300" dirty="0"/>
+          </a:p>
+        </p:txBody>
+      </p:sp>
+      <p:sp>
+        <p:nvSpPr>
+          <p:cNvPr id="35" name="Card head"/>
+          <p:cNvSpPr txBox="1"/>
+          <p:nvPr/>
+        </p:nvSpPr>
+        <p:spPr>
+          <a:xfrm>
+            <a:off x="9258071" y="4526280"/>
+            <a:ext cx="2202104" cy="1060704"/>
+          </a:xfrm>
+          <a:prstGeom prst="rect">
+            <a:avLst/>
+          </a:prstGeom>
+          <a:noFill/>
+          <a:ln/>
+        </p:spPr>
+        <p:txBody>
+          <a:bodyPr wrap="square" lIns="0" tIns="0" rIns="0" bIns="0" rtlCol="0" anchor="t"/>
+          <a:lstStyle/>
+          <a:p>
+            <a:pPr indent="0" marL="0">
+              <a:buNone/>
+            </a:pPr>
+            <a:r>
+              <a:rPr lang="en-US" sz="1500" b="1" dirty="0">
+                <a:solidFill>
+                  <a:schemeClr val="tx1"/>
+                </a:solidFill>
+                <a:latin typeface="Cambria" pitchFamily="34" charset="0"/>
+                <a:ea typeface="Cambria" pitchFamily="34" charset="-122"/>
+                <a:cs typeface="Cambria" pitchFamily="34" charset="-120"/>
+              </a:rPr>
+              <a:t>One Program: Check, Order, Price, Certify</a:t>
+            </a:r>
+            <a:endParaRPr lang="en-US" sz="1500" dirty="0"/>
+          </a:p>
+        </p:txBody>
+      </p:sp>
+      <p:sp>
+        <p:nvSpPr>
+          <p:cNvPr id="36" name="Card text"/>
+          <p:cNvSpPr txBox="1"/>
+          <p:nvPr/>
+        </p:nvSpPr>
+        <p:spPr>
+          <a:xfrm>
+            <a:off x="9258071" y="5660136"/>
             <a:ext cx="2202104" cy="384048"/>
           </a:xfrm>
           <a:prstGeom prst="rect">
